--- a/Fase 2/Evidencias Proyecto/Presentación Proyecto.pptx
+++ b/Fase 2/Evidencias Proyecto/Presentación Proyecto.pptx
@@ -17,25 +17,26 @@
     <p:sldId id="265" r:id="rId15"/>
     <p:sldId id="266" r:id="rId16"/>
     <p:sldId id="267" r:id="rId17"/>
+    <p:sldId id="268" r:id="rId18"/>
   </p:sldIdLst>
   <p:sldSz cx="18288000" cy="10287000"/>
   <p:notesSz cx="6858000" cy="9144000"/>
   <p:embeddedFontLst>
     <p:embeddedFont>
       <p:font typeface="Poppins Bold" charset="1" panose="00000800000000000000"/>
-      <p:regular r:id="rId18"/>
+      <p:regular r:id="rId19"/>
     </p:embeddedFont>
     <p:embeddedFont>
       <p:font typeface="Poppins" charset="1" panose="00000500000000000000"/>
-      <p:regular r:id="rId19"/>
+      <p:regular r:id="rId20"/>
     </p:embeddedFont>
     <p:embeddedFont>
       <p:font typeface="Poppins Light" charset="1" panose="00000400000000000000"/>
-      <p:regular r:id="rId20"/>
+      <p:regular r:id="rId21"/>
     </p:embeddedFont>
     <p:embeddedFont>
       <p:font typeface="Poppins Semi-Bold" charset="1" panose="00000700000000000000"/>
-      <p:regular r:id="rId21"/>
+      <p:regular r:id="rId22"/>
     </p:embeddedFont>
   </p:embeddedFontLst>
   <p:defaultTextStyle>
@@ -4038,6 +4039,1095 @@
           </a:blipFill>
         </p:spPr>
       </p:sp>
+      <p:grpSp>
+        <p:nvGrpSpPr>
+          <p:cNvPr name="Group 5" id="5"/>
+          <p:cNvGrpSpPr/>
+          <p:nvPr/>
+        </p:nvGrpSpPr>
+        <p:grpSpPr>
+          <a:xfrm rot="0">
+            <a:off x="6036903" y="713794"/>
+            <a:ext cx="6214194" cy="629811"/>
+            <a:chOff x="0" y="0"/>
+            <a:chExt cx="1636660" cy="165876"/>
+          </a:xfrm>
+        </p:grpSpPr>
+        <p:sp>
+          <p:nvSpPr>
+            <p:cNvPr name="Freeform 6" id="6"/>
+            <p:cNvSpPr/>
+            <p:nvPr/>
+          </p:nvSpPr>
+          <p:spPr>
+            <a:xfrm flipH="false" flipV="false" rot="0">
+              <a:off x="0" y="0"/>
+              <a:ext cx="1636660" cy="165876"/>
+            </a:xfrm>
+            <a:custGeom>
+              <a:avLst/>
+              <a:gdLst/>
+              <a:ahLst/>
+              <a:cxnLst/>
+              <a:rect r="r" b="b" t="t" l="l"/>
+              <a:pathLst>
+                <a:path h="165876" w="1636660">
+                  <a:moveTo>
+                    <a:pt x="68521" y="0"/>
+                  </a:moveTo>
+                  <a:lnTo>
+                    <a:pt x="1568139" y="0"/>
+                  </a:lnTo>
+                  <a:cubicBezTo>
+                    <a:pt x="1586312" y="0"/>
+                    <a:pt x="1603740" y="7219"/>
+                    <a:pt x="1616591" y="20069"/>
+                  </a:cubicBezTo>
+                  <a:cubicBezTo>
+                    <a:pt x="1629441" y="32920"/>
+                    <a:pt x="1636660" y="50348"/>
+                    <a:pt x="1636660" y="68521"/>
+                  </a:cubicBezTo>
+                  <a:lnTo>
+                    <a:pt x="1636660" y="97355"/>
+                  </a:lnTo>
+                  <a:cubicBezTo>
+                    <a:pt x="1636660" y="115528"/>
+                    <a:pt x="1629441" y="132957"/>
+                    <a:pt x="1616591" y="145807"/>
+                  </a:cubicBezTo>
+                  <a:cubicBezTo>
+                    <a:pt x="1603740" y="158657"/>
+                    <a:pt x="1586312" y="165876"/>
+                    <a:pt x="1568139" y="165876"/>
+                  </a:cubicBezTo>
+                  <a:lnTo>
+                    <a:pt x="68521" y="165876"/>
+                  </a:lnTo>
+                  <a:cubicBezTo>
+                    <a:pt x="50348" y="165876"/>
+                    <a:pt x="32920" y="158657"/>
+                    <a:pt x="20069" y="145807"/>
+                  </a:cubicBezTo>
+                  <a:cubicBezTo>
+                    <a:pt x="7219" y="132957"/>
+                    <a:pt x="0" y="115528"/>
+                    <a:pt x="0" y="97355"/>
+                  </a:cubicBezTo>
+                  <a:lnTo>
+                    <a:pt x="0" y="68521"/>
+                  </a:lnTo>
+                  <a:cubicBezTo>
+                    <a:pt x="0" y="50348"/>
+                    <a:pt x="7219" y="32920"/>
+                    <a:pt x="20069" y="20069"/>
+                  </a:cubicBezTo>
+                  <a:cubicBezTo>
+                    <a:pt x="32920" y="7219"/>
+                    <a:pt x="50348" y="0"/>
+                    <a:pt x="68521" y="0"/>
+                  </a:cubicBezTo>
+                  <a:close/>
+                </a:path>
+              </a:pathLst>
+            </a:custGeom>
+            <a:gradFill rotWithShape="true">
+              <a:gsLst>
+                <a:gs pos="0">
+                  <a:srgbClr val="9D0186">
+                    <a:alpha val="100000"/>
+                  </a:srgbClr>
+                </a:gs>
+                <a:gs pos="100000">
+                  <a:srgbClr val="A50288">
+                    <a:alpha val="0"/>
+                  </a:srgbClr>
+                </a:gs>
+              </a:gsLst>
+              <a:lin ang="0"/>
+            </a:gradFill>
+            <a:ln cap="rnd">
+              <a:noFill/>
+              <a:prstDash val="solid"/>
+              <a:round/>
+            </a:ln>
+          </p:spPr>
+        </p:sp>
+        <p:sp>
+          <p:nvSpPr>
+            <p:cNvPr name="TextBox 7" id="7"/>
+            <p:cNvSpPr txBox="true"/>
+            <p:nvPr/>
+          </p:nvSpPr>
+          <p:spPr>
+            <a:xfrm>
+              <a:off x="0" y="-66675"/>
+              <a:ext cx="1636660" cy="232551"/>
+            </a:xfrm>
+            <a:prstGeom prst="rect">
+              <a:avLst/>
+            </a:prstGeom>
+          </p:spPr>
+          <p:txBody>
+            <a:bodyPr anchor="ctr" rtlCol="false" tIns="50800" lIns="50800" bIns="50800" rIns="50800"/>
+            <a:lstStyle/>
+            <a:p>
+              <a:pPr algn="ctr">
+                <a:lnSpc>
+                  <a:spcPts val="2800"/>
+                </a:lnSpc>
+              </a:pPr>
+            </a:p>
+          </p:txBody>
+        </p:sp>
+      </p:grpSp>
+      <p:sp>
+        <p:nvSpPr>
+          <p:cNvPr name="TextBox 8" id="8"/>
+          <p:cNvSpPr txBox="true"/>
+          <p:nvPr/>
+        </p:nvSpPr>
+        <p:spPr>
+          <a:xfrm rot="0">
+            <a:off x="8640412" y="811213"/>
+            <a:ext cx="1007175" cy="368300"/>
+          </a:xfrm>
+          <a:prstGeom prst="rect">
+            <a:avLst/>
+          </a:prstGeom>
+        </p:spPr>
+        <p:txBody>
+          <a:bodyPr anchor="t" rtlCol="false" tIns="0" lIns="0" bIns="0" rIns="0">
+            <a:spAutoFit/>
+          </a:bodyPr>
+          <a:lstStyle/>
+          <a:p>
+            <a:pPr algn="ctr">
+              <a:lnSpc>
+                <a:spcPts val="2800"/>
+              </a:lnSpc>
+            </a:pPr>
+            <a:r>
+              <a:rPr lang="en-US" b="true" sz="2000">
+                <a:solidFill>
+                  <a:srgbClr val="FFFFFF"/>
+                </a:solidFill>
+                <a:latin typeface="Poppins Bold"/>
+                <a:ea typeface="Poppins Bold"/>
+                <a:cs typeface="Poppins Bold"/>
+                <a:sym typeface="Poppins Bold"/>
+              </a:rPr>
+              <a:t>HOME</a:t>
+            </a:r>
+          </a:p>
+        </p:txBody>
+      </p:sp>
+      <p:sp>
+        <p:nvSpPr>
+          <p:cNvPr name="TextBox 9" id="9"/>
+          <p:cNvSpPr txBox="true"/>
+          <p:nvPr/>
+        </p:nvSpPr>
+        <p:spPr>
+          <a:xfrm rot="0">
+            <a:off x="6546463" y="811213"/>
+            <a:ext cx="1007175" cy="368300"/>
+          </a:xfrm>
+          <a:prstGeom prst="rect">
+            <a:avLst/>
+          </a:prstGeom>
+        </p:spPr>
+        <p:txBody>
+          <a:bodyPr anchor="t" rtlCol="false" tIns="0" lIns="0" bIns="0" rIns="0">
+            <a:spAutoFit/>
+          </a:bodyPr>
+          <a:lstStyle/>
+          <a:p>
+            <a:pPr algn="ctr">
+              <a:lnSpc>
+                <a:spcPts val="2800"/>
+              </a:lnSpc>
+            </a:pPr>
+            <a:r>
+              <a:rPr lang="en-US" sz="2000">
+                <a:solidFill>
+                  <a:srgbClr val="FFFFFF"/>
+                </a:solidFill>
+                <a:latin typeface="Poppins"/>
+                <a:ea typeface="Poppins"/>
+                <a:cs typeface="Poppins"/>
+                <a:sym typeface="Poppins"/>
+              </a:rPr>
+              <a:t>ABOUT</a:t>
+            </a:r>
+          </a:p>
+        </p:txBody>
+      </p:sp>
+      <p:sp>
+        <p:nvSpPr>
+          <p:cNvPr name="TextBox 10" id="10"/>
+          <p:cNvSpPr txBox="true"/>
+          <p:nvPr/>
+        </p:nvSpPr>
+        <p:spPr>
+          <a:xfrm rot="0">
+            <a:off x="10733438" y="811213"/>
+            <a:ext cx="1007175" cy="368300"/>
+          </a:xfrm>
+          <a:prstGeom prst="rect">
+            <a:avLst/>
+          </a:prstGeom>
+        </p:spPr>
+        <p:txBody>
+          <a:bodyPr anchor="t" rtlCol="false" tIns="0" lIns="0" bIns="0" rIns="0">
+            <a:spAutoFit/>
+          </a:bodyPr>
+          <a:lstStyle/>
+          <a:p>
+            <a:pPr algn="ctr">
+              <a:lnSpc>
+                <a:spcPts val="2800"/>
+              </a:lnSpc>
+            </a:pPr>
+            <a:r>
+              <a:rPr lang="en-US" sz="2000">
+                <a:solidFill>
+                  <a:srgbClr val="FFFFFF"/>
+                </a:solidFill>
+                <a:latin typeface="Poppins"/>
+                <a:ea typeface="Poppins"/>
+                <a:cs typeface="Poppins"/>
+                <a:sym typeface="Poppins"/>
+              </a:rPr>
+              <a:t>MORE</a:t>
+            </a:r>
+          </a:p>
+        </p:txBody>
+      </p:sp>
+      <p:grpSp>
+        <p:nvGrpSpPr>
+          <p:cNvPr name="Group 11" id="11"/>
+          <p:cNvGrpSpPr/>
+          <p:nvPr/>
+        </p:nvGrpSpPr>
+        <p:grpSpPr>
+          <a:xfrm rot="0">
+            <a:off x="6036903" y="713794"/>
+            <a:ext cx="6214194" cy="629811"/>
+            <a:chOff x="0" y="0"/>
+            <a:chExt cx="1636660" cy="165876"/>
+          </a:xfrm>
+        </p:grpSpPr>
+        <p:sp>
+          <p:nvSpPr>
+            <p:cNvPr name="Freeform 12" id="12"/>
+            <p:cNvSpPr/>
+            <p:nvPr/>
+          </p:nvSpPr>
+          <p:spPr>
+            <a:xfrm flipH="false" flipV="false" rot="0">
+              <a:off x="0" y="0"/>
+              <a:ext cx="1636660" cy="165876"/>
+            </a:xfrm>
+            <a:custGeom>
+              <a:avLst/>
+              <a:gdLst/>
+              <a:ahLst/>
+              <a:cxnLst/>
+              <a:rect r="r" b="b" t="t" l="l"/>
+              <a:pathLst>
+                <a:path h="165876" w="1636660">
+                  <a:moveTo>
+                    <a:pt x="68521" y="0"/>
+                  </a:moveTo>
+                  <a:lnTo>
+                    <a:pt x="1568139" y="0"/>
+                  </a:lnTo>
+                  <a:cubicBezTo>
+                    <a:pt x="1586312" y="0"/>
+                    <a:pt x="1603740" y="7219"/>
+                    <a:pt x="1616591" y="20069"/>
+                  </a:cubicBezTo>
+                  <a:cubicBezTo>
+                    <a:pt x="1629441" y="32920"/>
+                    <a:pt x="1636660" y="50348"/>
+                    <a:pt x="1636660" y="68521"/>
+                  </a:cubicBezTo>
+                  <a:lnTo>
+                    <a:pt x="1636660" y="97355"/>
+                  </a:lnTo>
+                  <a:cubicBezTo>
+                    <a:pt x="1636660" y="115528"/>
+                    <a:pt x="1629441" y="132957"/>
+                    <a:pt x="1616591" y="145807"/>
+                  </a:cubicBezTo>
+                  <a:cubicBezTo>
+                    <a:pt x="1603740" y="158657"/>
+                    <a:pt x="1586312" y="165876"/>
+                    <a:pt x="1568139" y="165876"/>
+                  </a:cubicBezTo>
+                  <a:lnTo>
+                    <a:pt x="68521" y="165876"/>
+                  </a:lnTo>
+                  <a:cubicBezTo>
+                    <a:pt x="50348" y="165876"/>
+                    <a:pt x="32920" y="158657"/>
+                    <a:pt x="20069" y="145807"/>
+                  </a:cubicBezTo>
+                  <a:cubicBezTo>
+                    <a:pt x="7219" y="132957"/>
+                    <a:pt x="0" y="115528"/>
+                    <a:pt x="0" y="97355"/>
+                  </a:cubicBezTo>
+                  <a:lnTo>
+                    <a:pt x="0" y="68521"/>
+                  </a:lnTo>
+                  <a:cubicBezTo>
+                    <a:pt x="0" y="50348"/>
+                    <a:pt x="7219" y="32920"/>
+                    <a:pt x="20069" y="20069"/>
+                  </a:cubicBezTo>
+                  <a:cubicBezTo>
+                    <a:pt x="32920" y="7219"/>
+                    <a:pt x="50348" y="0"/>
+                    <a:pt x="68521" y="0"/>
+                  </a:cubicBezTo>
+                  <a:close/>
+                </a:path>
+              </a:pathLst>
+            </a:custGeom>
+            <a:gradFill rotWithShape="true">
+              <a:gsLst>
+                <a:gs pos="0">
+                  <a:srgbClr val="FF004D">
+                    <a:alpha val="100000"/>
+                  </a:srgbClr>
+                </a:gs>
+                <a:gs pos="100000">
+                  <a:srgbClr val="FF54DF">
+                    <a:alpha val="100000"/>
+                  </a:srgbClr>
+                </a:gs>
+              </a:gsLst>
+              <a:lin ang="0"/>
+            </a:gradFill>
+            <a:ln cap="rnd">
+              <a:noFill/>
+              <a:prstDash val="solid"/>
+              <a:round/>
+            </a:ln>
+          </p:spPr>
+        </p:sp>
+        <p:sp>
+          <p:nvSpPr>
+            <p:cNvPr name="TextBox 13" id="13"/>
+            <p:cNvSpPr txBox="true"/>
+            <p:nvPr/>
+          </p:nvSpPr>
+          <p:spPr>
+            <a:xfrm>
+              <a:off x="0" y="-66675"/>
+              <a:ext cx="1636660" cy="232551"/>
+            </a:xfrm>
+            <a:prstGeom prst="rect">
+              <a:avLst/>
+            </a:prstGeom>
+          </p:spPr>
+          <p:txBody>
+            <a:bodyPr anchor="ctr" rtlCol="false" tIns="50800" lIns="50800" bIns="50800" rIns="50800"/>
+            <a:lstStyle/>
+            <a:p>
+              <a:pPr algn="ctr">
+                <a:lnSpc>
+                  <a:spcPts val="2800"/>
+                </a:lnSpc>
+              </a:pPr>
+            </a:p>
+          </p:txBody>
+        </p:sp>
+      </p:grpSp>
+      <p:grpSp>
+        <p:nvGrpSpPr>
+          <p:cNvPr name="Group 14" id="14"/>
+          <p:cNvGrpSpPr/>
+          <p:nvPr/>
+        </p:nvGrpSpPr>
+        <p:grpSpPr>
+          <a:xfrm rot="-10800000">
+            <a:off x="-142334" y="1609585"/>
+            <a:ext cx="3908141" cy="854170"/>
+            <a:chOff x="0" y="0"/>
+            <a:chExt cx="1029305" cy="224967"/>
+          </a:xfrm>
+        </p:grpSpPr>
+        <p:sp>
+          <p:nvSpPr>
+            <p:cNvPr name="Freeform 15" id="15"/>
+            <p:cNvSpPr/>
+            <p:nvPr/>
+          </p:nvSpPr>
+          <p:spPr>
+            <a:xfrm flipH="false" flipV="false" rot="0">
+              <a:off x="0" y="0"/>
+              <a:ext cx="1029305" cy="224967"/>
+            </a:xfrm>
+            <a:custGeom>
+              <a:avLst/>
+              <a:gdLst/>
+              <a:ahLst/>
+              <a:cxnLst/>
+              <a:rect r="r" b="b" t="t" l="l"/>
+              <a:pathLst>
+                <a:path h="224967" w="1029305">
+                  <a:moveTo>
+                    <a:pt x="55467" y="0"/>
+                  </a:moveTo>
+                  <a:lnTo>
+                    <a:pt x="973837" y="0"/>
+                  </a:lnTo>
+                  <a:cubicBezTo>
+                    <a:pt x="988548" y="0"/>
+                    <a:pt x="1002657" y="5844"/>
+                    <a:pt x="1013059" y="16246"/>
+                  </a:cubicBezTo>
+                  <a:cubicBezTo>
+                    <a:pt x="1023461" y="26648"/>
+                    <a:pt x="1029305" y="40756"/>
+                    <a:pt x="1029305" y="55467"/>
+                  </a:cubicBezTo>
+                  <a:lnTo>
+                    <a:pt x="1029305" y="169499"/>
+                  </a:lnTo>
+                  <a:cubicBezTo>
+                    <a:pt x="1029305" y="184210"/>
+                    <a:pt x="1023461" y="198318"/>
+                    <a:pt x="1013059" y="208721"/>
+                  </a:cubicBezTo>
+                  <a:cubicBezTo>
+                    <a:pt x="1002657" y="219123"/>
+                    <a:pt x="988548" y="224967"/>
+                    <a:pt x="973837" y="224967"/>
+                  </a:cubicBezTo>
+                  <a:lnTo>
+                    <a:pt x="55467" y="224967"/>
+                  </a:lnTo>
+                  <a:cubicBezTo>
+                    <a:pt x="40756" y="224967"/>
+                    <a:pt x="26648" y="219123"/>
+                    <a:pt x="16246" y="208721"/>
+                  </a:cubicBezTo>
+                  <a:cubicBezTo>
+                    <a:pt x="5844" y="198318"/>
+                    <a:pt x="0" y="184210"/>
+                    <a:pt x="0" y="169499"/>
+                  </a:cubicBezTo>
+                  <a:lnTo>
+                    <a:pt x="0" y="55467"/>
+                  </a:lnTo>
+                  <a:cubicBezTo>
+                    <a:pt x="0" y="40756"/>
+                    <a:pt x="5844" y="26648"/>
+                    <a:pt x="16246" y="16246"/>
+                  </a:cubicBezTo>
+                  <a:cubicBezTo>
+                    <a:pt x="26648" y="5844"/>
+                    <a:pt x="40756" y="0"/>
+                    <a:pt x="55467" y="0"/>
+                  </a:cubicBezTo>
+                  <a:close/>
+                </a:path>
+              </a:pathLst>
+            </a:custGeom>
+            <a:gradFill rotWithShape="true">
+              <a:gsLst>
+                <a:gs pos="0">
+                  <a:srgbClr val="9D0186">
+                    <a:alpha val="100000"/>
+                  </a:srgbClr>
+                </a:gs>
+                <a:gs pos="100000">
+                  <a:srgbClr val="A50288">
+                    <a:alpha val="0"/>
+                  </a:srgbClr>
+                </a:gs>
+              </a:gsLst>
+              <a:lin ang="0"/>
+            </a:gradFill>
+            <a:ln w="47625" cap="rnd">
+              <a:gradFill>
+                <a:gsLst>
+                  <a:gs pos="0">
+                    <a:srgbClr val="9D0186">
+                      <a:alpha val="100000"/>
+                    </a:srgbClr>
+                  </a:gs>
+                  <a:gs pos="100000">
+                    <a:srgbClr val="A50288">
+                      <a:alpha val="0"/>
+                    </a:srgbClr>
+                  </a:gs>
+                </a:gsLst>
+                <a:lin ang="0"/>
+              </a:gradFill>
+              <a:prstDash val="solid"/>
+              <a:round/>
+            </a:ln>
+          </p:spPr>
+        </p:sp>
+        <p:sp>
+          <p:nvSpPr>
+            <p:cNvPr name="TextBox 16" id="16"/>
+            <p:cNvSpPr txBox="true"/>
+            <p:nvPr/>
+          </p:nvSpPr>
+          <p:spPr>
+            <a:xfrm>
+              <a:off x="0" y="-66675"/>
+              <a:ext cx="1029305" cy="291642"/>
+            </a:xfrm>
+            <a:prstGeom prst="rect">
+              <a:avLst/>
+            </a:prstGeom>
+          </p:spPr>
+          <p:txBody>
+            <a:bodyPr anchor="ctr" rtlCol="false" tIns="50800" lIns="50800" bIns="50800" rIns="50800"/>
+            <a:lstStyle/>
+            <a:p>
+              <a:pPr algn="ctr">
+                <a:lnSpc>
+                  <a:spcPts val="2800"/>
+                </a:lnSpc>
+              </a:pPr>
+            </a:p>
+          </p:txBody>
+        </p:sp>
+      </p:grpSp>
+      <p:sp>
+        <p:nvSpPr>
+          <p:cNvPr name="Freeform 17" id="17"/>
+          <p:cNvSpPr/>
+          <p:nvPr/>
+        </p:nvSpPr>
+        <p:spPr>
+          <a:xfrm flipH="false" flipV="false" rot="0">
+            <a:off x="296213" y="3765861"/>
+            <a:ext cx="7257425" cy="6123452"/>
+          </a:xfrm>
+          <a:custGeom>
+            <a:avLst/>
+            <a:gdLst/>
+            <a:ahLst/>
+            <a:cxnLst/>
+            <a:rect r="r" b="b" t="t" l="l"/>
+            <a:pathLst>
+              <a:path h="6123452" w="7257425">
+                <a:moveTo>
+                  <a:pt x="0" y="0"/>
+                </a:moveTo>
+                <a:lnTo>
+                  <a:pt x="7257425" y="0"/>
+                </a:lnTo>
+                <a:lnTo>
+                  <a:pt x="7257425" y="6123453"/>
+                </a:lnTo>
+                <a:lnTo>
+                  <a:pt x="0" y="6123453"/>
+                </a:lnTo>
+                <a:lnTo>
+                  <a:pt x="0" y="0"/>
+                </a:lnTo>
+                <a:close/>
+              </a:path>
+            </a:pathLst>
+          </a:custGeom>
+          <a:blipFill>
+            <a:blip r:embed="rId5"/>
+            <a:stretch>
+              <a:fillRect l="0" t="0" r="0" b="0"/>
+            </a:stretch>
+          </a:blipFill>
+        </p:spPr>
+      </p:sp>
+      <p:sp>
+        <p:nvSpPr>
+          <p:cNvPr name="Freeform 18" id="18"/>
+          <p:cNvSpPr/>
+          <p:nvPr/>
+        </p:nvSpPr>
+        <p:spPr>
+          <a:xfrm flipH="false" flipV="false" rot="0">
+            <a:off x="7832056" y="6509164"/>
+            <a:ext cx="4683256" cy="3307549"/>
+          </a:xfrm>
+          <a:custGeom>
+            <a:avLst/>
+            <a:gdLst/>
+            <a:ahLst/>
+            <a:cxnLst/>
+            <a:rect r="r" b="b" t="t" l="l"/>
+            <a:pathLst>
+              <a:path h="3307549" w="4683256">
+                <a:moveTo>
+                  <a:pt x="0" y="0"/>
+                </a:moveTo>
+                <a:lnTo>
+                  <a:pt x="4683256" y="0"/>
+                </a:lnTo>
+                <a:lnTo>
+                  <a:pt x="4683256" y="3307550"/>
+                </a:lnTo>
+                <a:lnTo>
+                  <a:pt x="0" y="3307550"/>
+                </a:lnTo>
+                <a:lnTo>
+                  <a:pt x="0" y="0"/>
+                </a:lnTo>
+                <a:close/>
+              </a:path>
+            </a:pathLst>
+          </a:custGeom>
+          <a:blipFill>
+            <a:blip r:embed="rId6"/>
+            <a:stretch>
+              <a:fillRect l="0" t="0" r="0" b="0"/>
+            </a:stretch>
+          </a:blipFill>
+        </p:spPr>
+      </p:sp>
+      <p:sp>
+        <p:nvSpPr>
+          <p:cNvPr name="Freeform 19" id="19"/>
+          <p:cNvSpPr/>
+          <p:nvPr/>
+        </p:nvSpPr>
+        <p:spPr>
+          <a:xfrm flipH="false" flipV="false" rot="0">
+            <a:off x="10113876" y="1849345"/>
+            <a:ext cx="7914767" cy="4659819"/>
+          </a:xfrm>
+          <a:custGeom>
+            <a:avLst/>
+            <a:gdLst/>
+            <a:ahLst/>
+            <a:cxnLst/>
+            <a:rect r="r" b="b" t="t" l="l"/>
+            <a:pathLst>
+              <a:path h="4659819" w="7914767">
+                <a:moveTo>
+                  <a:pt x="0" y="0"/>
+                </a:moveTo>
+                <a:lnTo>
+                  <a:pt x="7914767" y="0"/>
+                </a:lnTo>
+                <a:lnTo>
+                  <a:pt x="7914767" y="4659819"/>
+                </a:lnTo>
+                <a:lnTo>
+                  <a:pt x="0" y="4659819"/>
+                </a:lnTo>
+                <a:lnTo>
+                  <a:pt x="0" y="0"/>
+                </a:lnTo>
+                <a:close/>
+              </a:path>
+            </a:pathLst>
+          </a:custGeom>
+          <a:blipFill>
+            <a:blip r:embed="rId7"/>
+            <a:stretch>
+              <a:fillRect l="0" t="0" r="0" b="0"/>
+            </a:stretch>
+          </a:blipFill>
+        </p:spPr>
+      </p:sp>
+      <p:sp>
+        <p:nvSpPr>
+          <p:cNvPr name="Freeform 20" id="20"/>
+          <p:cNvSpPr/>
+          <p:nvPr/>
+        </p:nvSpPr>
+        <p:spPr>
+          <a:xfrm flipH="false" flipV="false" rot="0">
+            <a:off x="12339870" y="7388116"/>
+            <a:ext cx="5688773" cy="1870184"/>
+          </a:xfrm>
+          <a:custGeom>
+            <a:avLst/>
+            <a:gdLst/>
+            <a:ahLst/>
+            <a:cxnLst/>
+            <a:rect r="r" b="b" t="t" l="l"/>
+            <a:pathLst>
+              <a:path h="1870184" w="5688773">
+                <a:moveTo>
+                  <a:pt x="0" y="0"/>
+                </a:moveTo>
+                <a:lnTo>
+                  <a:pt x="5688773" y="0"/>
+                </a:lnTo>
+                <a:lnTo>
+                  <a:pt x="5688773" y="1870184"/>
+                </a:lnTo>
+                <a:lnTo>
+                  <a:pt x="0" y="1870184"/>
+                </a:lnTo>
+                <a:lnTo>
+                  <a:pt x="0" y="0"/>
+                </a:lnTo>
+                <a:close/>
+              </a:path>
+            </a:pathLst>
+          </a:custGeom>
+          <a:blipFill>
+            <a:blip r:embed="rId8"/>
+            <a:stretch>
+              <a:fillRect l="0" t="0" r="0" b="0"/>
+            </a:stretch>
+          </a:blipFill>
+        </p:spPr>
+      </p:sp>
+      <p:sp>
+        <p:nvSpPr>
+          <p:cNvPr name="TextBox 21" id="21"/>
+          <p:cNvSpPr txBox="true"/>
+          <p:nvPr/>
+        </p:nvSpPr>
+        <p:spPr>
+          <a:xfrm rot="0">
+            <a:off x="8174124" y="811213"/>
+            <a:ext cx="1939751" cy="368300"/>
+          </a:xfrm>
+          <a:prstGeom prst="rect">
+            <a:avLst/>
+          </a:prstGeom>
+        </p:spPr>
+        <p:txBody>
+          <a:bodyPr anchor="t" rtlCol="false" tIns="0" lIns="0" bIns="0" rIns="0">
+            <a:spAutoFit/>
+          </a:bodyPr>
+          <a:lstStyle/>
+          <a:p>
+            <a:pPr algn="ctr">
+              <a:lnSpc>
+                <a:spcPts val="2800"/>
+              </a:lnSpc>
+            </a:pPr>
+            <a:r>
+              <a:rPr lang="en-US" b="true" sz="2000">
+                <a:solidFill>
+                  <a:srgbClr val="FFFFFF"/>
+                </a:solidFill>
+                <a:latin typeface="Poppins Bold"/>
+                <a:ea typeface="Poppins Bold"/>
+                <a:cs typeface="Poppins Bold"/>
+                <a:sym typeface="Poppins Bold"/>
+              </a:rPr>
+              <a:t>MODULOS</a:t>
+            </a:r>
+          </a:p>
+        </p:txBody>
+      </p:sp>
+      <p:sp>
+        <p:nvSpPr>
+          <p:cNvPr name="TextBox 22" id="22"/>
+          <p:cNvSpPr txBox="true"/>
+          <p:nvPr/>
+        </p:nvSpPr>
+        <p:spPr>
+          <a:xfrm rot="0">
+            <a:off x="6546463" y="811213"/>
+            <a:ext cx="1007175" cy="368300"/>
+          </a:xfrm>
+          <a:prstGeom prst="rect">
+            <a:avLst/>
+          </a:prstGeom>
+        </p:spPr>
+        <p:txBody>
+          <a:bodyPr anchor="t" rtlCol="false" tIns="0" lIns="0" bIns="0" rIns="0">
+            <a:spAutoFit/>
+          </a:bodyPr>
+          <a:lstStyle/>
+          <a:p>
+            <a:pPr algn="ctr">
+              <a:lnSpc>
+                <a:spcPts val="2800"/>
+              </a:lnSpc>
+            </a:pPr>
+            <a:r>
+              <a:rPr lang="en-US" sz="2000">
+                <a:solidFill>
+                  <a:srgbClr val="FFFFFF"/>
+                </a:solidFill>
+                <a:latin typeface="Poppins"/>
+                <a:ea typeface="Poppins"/>
+                <a:cs typeface="Poppins"/>
+                <a:sym typeface="Poppins"/>
+              </a:rPr>
+              <a:t>CORE</a:t>
+            </a:r>
+          </a:p>
+        </p:txBody>
+      </p:sp>
+      <p:sp>
+        <p:nvSpPr>
+          <p:cNvPr name="TextBox 23" id="23"/>
+          <p:cNvSpPr txBox="true"/>
+          <p:nvPr/>
+        </p:nvSpPr>
+        <p:spPr>
+          <a:xfrm rot="0">
+            <a:off x="10733438" y="811213"/>
+            <a:ext cx="1007175" cy="368300"/>
+          </a:xfrm>
+          <a:prstGeom prst="rect">
+            <a:avLst/>
+          </a:prstGeom>
+        </p:spPr>
+        <p:txBody>
+          <a:bodyPr anchor="t" rtlCol="false" tIns="0" lIns="0" bIns="0" rIns="0">
+            <a:spAutoFit/>
+          </a:bodyPr>
+          <a:lstStyle/>
+          <a:p>
+            <a:pPr algn="ctr">
+              <a:lnSpc>
+                <a:spcPts val="2800"/>
+              </a:lnSpc>
+            </a:pPr>
+            <a:r>
+              <a:rPr lang="en-US" sz="2000">
+                <a:solidFill>
+                  <a:srgbClr val="FFFFFF"/>
+                </a:solidFill>
+                <a:latin typeface="Poppins"/>
+                <a:ea typeface="Poppins"/>
+                <a:cs typeface="Poppins"/>
+                <a:sym typeface="Poppins"/>
+              </a:rPr>
+              <a:t>UTILS</a:t>
+            </a:r>
+          </a:p>
+        </p:txBody>
+      </p:sp>
+      <p:sp>
+        <p:nvSpPr>
+          <p:cNvPr name="TextBox 24" id="24"/>
+          <p:cNvSpPr txBox="true"/>
+          <p:nvPr/>
+        </p:nvSpPr>
+        <p:spPr>
+          <a:xfrm rot="0">
+            <a:off x="353052" y="1782670"/>
+            <a:ext cx="3283922" cy="441325"/>
+          </a:xfrm>
+          <a:prstGeom prst="rect">
+            <a:avLst/>
+          </a:prstGeom>
+        </p:spPr>
+        <p:txBody>
+          <a:bodyPr anchor="t" rtlCol="false" tIns="0" lIns="0" bIns="0" rIns="0">
+            <a:spAutoFit/>
+          </a:bodyPr>
+          <a:lstStyle/>
+          <a:p>
+            <a:pPr algn="just" marL="0" indent="0" lvl="0">
+              <a:lnSpc>
+                <a:spcPts val="3499"/>
+              </a:lnSpc>
+              <a:spcBef>
+                <a:spcPct val="0"/>
+              </a:spcBef>
+            </a:pPr>
+            <a:r>
+              <a:rPr lang="en-US" b="true" sz="2499">
+                <a:solidFill>
+                  <a:srgbClr val="FFFFFF"/>
+                </a:solidFill>
+                <a:latin typeface="Poppins Semi-Bold"/>
+                <a:ea typeface="Poppins Semi-Bold"/>
+                <a:cs typeface="Poppins Semi-Bold"/>
+                <a:sym typeface="Poppins Semi-Bold"/>
+              </a:rPr>
+              <a:t>TEST COGNITIVOS</a:t>
+            </a:r>
+          </a:p>
+        </p:txBody>
+      </p:sp>
+    </p:spTree>
+  </p:cSld>
+  <p:clrMapOvr>
+    <a:masterClrMapping/>
+  </p:clrMapOvr>
+</p:sld>
+</file>
+
+<file path=ppt/slides/slide11.xml><?xml version="1.0" encoding="utf-8"?>
+<p:sld xmlns:p="http://schemas.openxmlformats.org/presentationml/2006/main" xmlns:a="http://schemas.openxmlformats.org/drawingml/2006/main" xmlns:r="http://schemas.openxmlformats.org/officeDocument/2006/relationships">
+  <p:cSld>
+    <p:spTree>
+      <p:nvGrpSpPr>
+        <p:cNvPr id="1" name=""/>
+        <p:cNvGrpSpPr/>
+        <p:nvPr/>
+      </p:nvGrpSpPr>
+      <p:grpSpPr>
+        <a:xfrm>
+          <a:off x="0" y="0"/>
+          <a:ext cx="0" cy="0"/>
+          <a:chOff x="0" y="0"/>
+          <a:chExt cx="0" cy="0"/>
+        </a:xfrm>
+      </p:grpSpPr>
+      <p:sp>
+        <p:nvSpPr>
+          <p:cNvPr name="Freeform 2" id="2"/>
+          <p:cNvSpPr/>
+          <p:nvPr/>
+        </p:nvSpPr>
+        <p:spPr>
+          <a:xfrm flipH="false" flipV="false" rot="0">
+            <a:off x="0" y="0"/>
+            <a:ext cx="18288000" cy="10287000"/>
+          </a:xfrm>
+          <a:custGeom>
+            <a:avLst/>
+            <a:gdLst/>
+            <a:ahLst/>
+            <a:cxnLst/>
+            <a:rect r="r" b="b" t="t" l="l"/>
+            <a:pathLst>
+              <a:path h="10287000" w="18288000">
+                <a:moveTo>
+                  <a:pt x="0" y="0"/>
+                </a:moveTo>
+                <a:lnTo>
+                  <a:pt x="18288000" y="0"/>
+                </a:lnTo>
+                <a:lnTo>
+                  <a:pt x="18288000" y="10287000"/>
+                </a:lnTo>
+                <a:lnTo>
+                  <a:pt x="0" y="10287000"/>
+                </a:lnTo>
+                <a:lnTo>
+                  <a:pt x="0" y="0"/>
+                </a:lnTo>
+                <a:close/>
+              </a:path>
+            </a:pathLst>
+          </a:custGeom>
+          <a:blipFill>
+            <a:blip r:embed="rId2"/>
+            <a:stretch>
+              <a:fillRect l="0" t="-9222" r="0" b="-9222"/>
+            </a:stretch>
+          </a:blipFill>
+        </p:spPr>
+      </p:sp>
+      <p:sp>
+        <p:nvSpPr>
+          <p:cNvPr name="Freeform 3" id="3"/>
+          <p:cNvSpPr/>
+          <p:nvPr/>
+        </p:nvSpPr>
+        <p:spPr>
+          <a:xfrm flipH="false" flipV="false" rot="0">
+            <a:off x="-1256894" y="8250330"/>
+            <a:ext cx="6987516" cy="4114800"/>
+          </a:xfrm>
+          <a:custGeom>
+            <a:avLst/>
+            <a:gdLst/>
+            <a:ahLst/>
+            <a:cxnLst/>
+            <a:rect r="r" b="b" t="t" l="l"/>
+            <a:pathLst>
+              <a:path h="4114800" w="6987516">
+                <a:moveTo>
+                  <a:pt x="0" y="0"/>
+                </a:moveTo>
+                <a:lnTo>
+                  <a:pt x="6987516" y="0"/>
+                </a:lnTo>
+                <a:lnTo>
+                  <a:pt x="6987516" y="4114800"/>
+                </a:lnTo>
+                <a:lnTo>
+                  <a:pt x="0" y="4114800"/>
+                </a:lnTo>
+                <a:lnTo>
+                  <a:pt x="0" y="0"/>
+                </a:lnTo>
+                <a:close/>
+              </a:path>
+            </a:pathLst>
+          </a:custGeom>
+          <a:blipFill>
+            <a:blip r:embed="rId3">
+              <a:extLst>
+                <a:ext uri="{96DAC541-7B7A-43D3-8B79-37D633B846F1}">
+                  <asvg:svgBlip xmlns:asvg="http://schemas.microsoft.com/office/drawing/2016/SVG/main" r:embed="rId4"/>
+                </a:ext>
+              </a:extLst>
+            </a:blip>
+            <a:stretch>
+              <a:fillRect l="0" t="0" r="0" b="0"/>
+            </a:stretch>
+          </a:blipFill>
+        </p:spPr>
+      </p:sp>
+      <p:sp>
+        <p:nvSpPr>
+          <p:cNvPr name="Freeform 4" id="4"/>
+          <p:cNvSpPr/>
+          <p:nvPr/>
+        </p:nvSpPr>
+        <p:spPr>
+          <a:xfrm flipH="false" flipV="false" rot="0">
+            <a:off x="12557378" y="-2078130"/>
+            <a:ext cx="6987516" cy="4114800"/>
+          </a:xfrm>
+          <a:custGeom>
+            <a:avLst/>
+            <a:gdLst/>
+            <a:ahLst/>
+            <a:cxnLst/>
+            <a:rect r="r" b="b" t="t" l="l"/>
+            <a:pathLst>
+              <a:path h="4114800" w="6987516">
+                <a:moveTo>
+                  <a:pt x="0" y="0"/>
+                </a:moveTo>
+                <a:lnTo>
+                  <a:pt x="6987516" y="0"/>
+                </a:lnTo>
+                <a:lnTo>
+                  <a:pt x="6987516" y="4114800"/>
+                </a:lnTo>
+                <a:lnTo>
+                  <a:pt x="0" y="4114800"/>
+                </a:lnTo>
+                <a:lnTo>
+                  <a:pt x="0" y="0"/>
+                </a:lnTo>
+                <a:close/>
+              </a:path>
+            </a:pathLst>
+          </a:custGeom>
+          <a:blipFill>
+            <a:blip r:embed="rId3">
+              <a:extLst>
+                <a:ext uri="{96DAC541-7B7A-43D3-8B79-37D633B846F1}">
+                  <asvg:svgBlip xmlns:asvg="http://schemas.microsoft.com/office/drawing/2016/SVG/main" r:embed="rId4"/>
+                </a:ext>
+              </a:extLst>
+            </a:blip>
+            <a:stretch>
+              <a:fillRect l="0" t="0" r="0" b="0"/>
+            </a:stretch>
+          </a:blipFill>
+        </p:spPr>
+      </p:sp>
       <p:sp>
         <p:nvSpPr>
           <p:cNvPr name="Freeform 5" id="5"/>
@@ -4938,7 +6028,7 @@
 </p:sld>
 </file>
 
-<file path=ppt/slides/slide11.xml><?xml version="1.0" encoding="utf-8"?>
+<file path=ppt/slides/slide12.xml><?xml version="1.0" encoding="utf-8"?>
 <p:sld xmlns:p="http://schemas.openxmlformats.org/presentationml/2006/main" xmlns:a="http://schemas.openxmlformats.org/drawingml/2006/main" xmlns:r="http://schemas.openxmlformats.org/officeDocument/2006/relationships">
   <p:cSld>
     <p:spTree>
@@ -5949,7 +7039,7 @@
 </p:sld>
 </file>
 
-<file path=ppt/slides/slide12.xml><?xml version="1.0" encoding="utf-8"?>
+<file path=ppt/slides/slide13.xml><?xml version="1.0" encoding="utf-8"?>
 <p:sld xmlns:p="http://schemas.openxmlformats.org/presentationml/2006/main" xmlns:a="http://schemas.openxmlformats.org/drawingml/2006/main" xmlns:r="http://schemas.openxmlformats.org/officeDocument/2006/relationships">
   <p:cSld>
     <p:spTree>
@@ -9525,6 +10615,839 @@
         </p:nvGrpSpPr>
         <p:grpSpPr>
           <a:xfrm rot="0">
+            <a:off x="6036903" y="713794"/>
+            <a:ext cx="6214194" cy="629811"/>
+            <a:chOff x="0" y="0"/>
+            <a:chExt cx="1636660" cy="165876"/>
+          </a:xfrm>
+        </p:grpSpPr>
+        <p:sp>
+          <p:nvSpPr>
+            <p:cNvPr name="Freeform 6" id="6"/>
+            <p:cNvSpPr/>
+            <p:nvPr/>
+          </p:nvSpPr>
+          <p:spPr>
+            <a:xfrm flipH="false" flipV="false" rot="0">
+              <a:off x="0" y="0"/>
+              <a:ext cx="1636660" cy="165876"/>
+            </a:xfrm>
+            <a:custGeom>
+              <a:avLst/>
+              <a:gdLst/>
+              <a:ahLst/>
+              <a:cxnLst/>
+              <a:rect r="r" b="b" t="t" l="l"/>
+              <a:pathLst>
+                <a:path h="165876" w="1636660">
+                  <a:moveTo>
+                    <a:pt x="68521" y="0"/>
+                  </a:moveTo>
+                  <a:lnTo>
+                    <a:pt x="1568139" y="0"/>
+                  </a:lnTo>
+                  <a:cubicBezTo>
+                    <a:pt x="1586312" y="0"/>
+                    <a:pt x="1603740" y="7219"/>
+                    <a:pt x="1616591" y="20069"/>
+                  </a:cubicBezTo>
+                  <a:cubicBezTo>
+                    <a:pt x="1629441" y="32920"/>
+                    <a:pt x="1636660" y="50348"/>
+                    <a:pt x="1636660" y="68521"/>
+                  </a:cubicBezTo>
+                  <a:lnTo>
+                    <a:pt x="1636660" y="97355"/>
+                  </a:lnTo>
+                  <a:cubicBezTo>
+                    <a:pt x="1636660" y="115528"/>
+                    <a:pt x="1629441" y="132957"/>
+                    <a:pt x="1616591" y="145807"/>
+                  </a:cubicBezTo>
+                  <a:cubicBezTo>
+                    <a:pt x="1603740" y="158657"/>
+                    <a:pt x="1586312" y="165876"/>
+                    <a:pt x="1568139" y="165876"/>
+                  </a:cubicBezTo>
+                  <a:lnTo>
+                    <a:pt x="68521" y="165876"/>
+                  </a:lnTo>
+                  <a:cubicBezTo>
+                    <a:pt x="50348" y="165876"/>
+                    <a:pt x="32920" y="158657"/>
+                    <a:pt x="20069" y="145807"/>
+                  </a:cubicBezTo>
+                  <a:cubicBezTo>
+                    <a:pt x="7219" y="132957"/>
+                    <a:pt x="0" y="115528"/>
+                    <a:pt x="0" y="97355"/>
+                  </a:cubicBezTo>
+                  <a:lnTo>
+                    <a:pt x="0" y="68521"/>
+                  </a:lnTo>
+                  <a:cubicBezTo>
+                    <a:pt x="0" y="50348"/>
+                    <a:pt x="7219" y="32920"/>
+                    <a:pt x="20069" y="20069"/>
+                  </a:cubicBezTo>
+                  <a:cubicBezTo>
+                    <a:pt x="32920" y="7219"/>
+                    <a:pt x="50348" y="0"/>
+                    <a:pt x="68521" y="0"/>
+                  </a:cubicBezTo>
+                  <a:close/>
+                </a:path>
+              </a:pathLst>
+            </a:custGeom>
+            <a:gradFill rotWithShape="true">
+              <a:gsLst>
+                <a:gs pos="0">
+                  <a:srgbClr val="9D0186">
+                    <a:alpha val="100000"/>
+                  </a:srgbClr>
+                </a:gs>
+                <a:gs pos="100000">
+                  <a:srgbClr val="A50288">
+                    <a:alpha val="0"/>
+                  </a:srgbClr>
+                </a:gs>
+              </a:gsLst>
+              <a:lin ang="0"/>
+            </a:gradFill>
+            <a:ln cap="rnd">
+              <a:noFill/>
+              <a:prstDash val="solid"/>
+              <a:round/>
+            </a:ln>
+          </p:spPr>
+        </p:sp>
+        <p:sp>
+          <p:nvSpPr>
+            <p:cNvPr name="TextBox 7" id="7"/>
+            <p:cNvSpPr txBox="true"/>
+            <p:nvPr/>
+          </p:nvSpPr>
+          <p:spPr>
+            <a:xfrm>
+              <a:off x="0" y="-66675"/>
+              <a:ext cx="1636660" cy="232551"/>
+            </a:xfrm>
+            <a:prstGeom prst="rect">
+              <a:avLst/>
+            </a:prstGeom>
+          </p:spPr>
+          <p:txBody>
+            <a:bodyPr anchor="ctr" rtlCol="false" tIns="50800" lIns="50800" bIns="50800" rIns="50800"/>
+            <a:lstStyle/>
+            <a:p>
+              <a:pPr algn="ctr">
+                <a:lnSpc>
+                  <a:spcPts val="2800"/>
+                </a:lnSpc>
+              </a:pPr>
+            </a:p>
+          </p:txBody>
+        </p:sp>
+      </p:grpSp>
+      <p:sp>
+        <p:nvSpPr>
+          <p:cNvPr name="TextBox 8" id="8"/>
+          <p:cNvSpPr txBox="true"/>
+          <p:nvPr/>
+        </p:nvSpPr>
+        <p:spPr>
+          <a:xfrm rot="0">
+            <a:off x="8640412" y="811213"/>
+            <a:ext cx="1007175" cy="368300"/>
+          </a:xfrm>
+          <a:prstGeom prst="rect">
+            <a:avLst/>
+          </a:prstGeom>
+        </p:spPr>
+        <p:txBody>
+          <a:bodyPr anchor="t" rtlCol="false" tIns="0" lIns="0" bIns="0" rIns="0">
+            <a:spAutoFit/>
+          </a:bodyPr>
+          <a:lstStyle/>
+          <a:p>
+            <a:pPr algn="ctr">
+              <a:lnSpc>
+                <a:spcPts val="2800"/>
+              </a:lnSpc>
+            </a:pPr>
+            <a:r>
+              <a:rPr lang="en-US" b="true" sz="2000">
+                <a:solidFill>
+                  <a:srgbClr val="FFFFFF"/>
+                </a:solidFill>
+                <a:latin typeface="Poppins Bold"/>
+                <a:ea typeface="Poppins Bold"/>
+                <a:cs typeface="Poppins Bold"/>
+                <a:sym typeface="Poppins Bold"/>
+              </a:rPr>
+              <a:t>HOME</a:t>
+            </a:r>
+          </a:p>
+        </p:txBody>
+      </p:sp>
+      <p:sp>
+        <p:nvSpPr>
+          <p:cNvPr name="TextBox 9" id="9"/>
+          <p:cNvSpPr txBox="true"/>
+          <p:nvPr/>
+        </p:nvSpPr>
+        <p:spPr>
+          <a:xfrm rot="0">
+            <a:off x="6546463" y="811213"/>
+            <a:ext cx="1007175" cy="368300"/>
+          </a:xfrm>
+          <a:prstGeom prst="rect">
+            <a:avLst/>
+          </a:prstGeom>
+        </p:spPr>
+        <p:txBody>
+          <a:bodyPr anchor="t" rtlCol="false" tIns="0" lIns="0" bIns="0" rIns="0">
+            <a:spAutoFit/>
+          </a:bodyPr>
+          <a:lstStyle/>
+          <a:p>
+            <a:pPr algn="ctr">
+              <a:lnSpc>
+                <a:spcPts val="2800"/>
+              </a:lnSpc>
+            </a:pPr>
+            <a:r>
+              <a:rPr lang="en-US" sz="2000">
+                <a:solidFill>
+                  <a:srgbClr val="FFFFFF"/>
+                </a:solidFill>
+                <a:latin typeface="Poppins"/>
+                <a:ea typeface="Poppins"/>
+                <a:cs typeface="Poppins"/>
+                <a:sym typeface="Poppins"/>
+              </a:rPr>
+              <a:t>ABOUT</a:t>
+            </a:r>
+          </a:p>
+        </p:txBody>
+      </p:sp>
+      <p:sp>
+        <p:nvSpPr>
+          <p:cNvPr name="TextBox 10" id="10"/>
+          <p:cNvSpPr txBox="true"/>
+          <p:nvPr/>
+        </p:nvSpPr>
+        <p:spPr>
+          <a:xfrm rot="0">
+            <a:off x="10733438" y="811213"/>
+            <a:ext cx="1007175" cy="368300"/>
+          </a:xfrm>
+          <a:prstGeom prst="rect">
+            <a:avLst/>
+          </a:prstGeom>
+        </p:spPr>
+        <p:txBody>
+          <a:bodyPr anchor="t" rtlCol="false" tIns="0" lIns="0" bIns="0" rIns="0">
+            <a:spAutoFit/>
+          </a:bodyPr>
+          <a:lstStyle/>
+          <a:p>
+            <a:pPr algn="ctr">
+              <a:lnSpc>
+                <a:spcPts val="2800"/>
+              </a:lnSpc>
+            </a:pPr>
+            <a:r>
+              <a:rPr lang="en-US" sz="2000">
+                <a:solidFill>
+                  <a:srgbClr val="FFFFFF"/>
+                </a:solidFill>
+                <a:latin typeface="Poppins"/>
+                <a:ea typeface="Poppins"/>
+                <a:cs typeface="Poppins"/>
+                <a:sym typeface="Poppins"/>
+              </a:rPr>
+              <a:t>MORE</a:t>
+            </a:r>
+          </a:p>
+        </p:txBody>
+      </p:sp>
+      <p:grpSp>
+        <p:nvGrpSpPr>
+          <p:cNvPr name="Group 11" id="11"/>
+          <p:cNvGrpSpPr/>
+          <p:nvPr/>
+        </p:nvGrpSpPr>
+        <p:grpSpPr>
+          <a:xfrm rot="0">
+            <a:off x="6036903" y="713794"/>
+            <a:ext cx="6214194" cy="629811"/>
+            <a:chOff x="0" y="0"/>
+            <a:chExt cx="1636660" cy="165876"/>
+          </a:xfrm>
+        </p:grpSpPr>
+        <p:sp>
+          <p:nvSpPr>
+            <p:cNvPr name="Freeform 12" id="12"/>
+            <p:cNvSpPr/>
+            <p:nvPr/>
+          </p:nvSpPr>
+          <p:spPr>
+            <a:xfrm flipH="false" flipV="false" rot="0">
+              <a:off x="0" y="0"/>
+              <a:ext cx="1636660" cy="165876"/>
+            </a:xfrm>
+            <a:custGeom>
+              <a:avLst/>
+              <a:gdLst/>
+              <a:ahLst/>
+              <a:cxnLst/>
+              <a:rect r="r" b="b" t="t" l="l"/>
+              <a:pathLst>
+                <a:path h="165876" w="1636660">
+                  <a:moveTo>
+                    <a:pt x="68521" y="0"/>
+                  </a:moveTo>
+                  <a:lnTo>
+                    <a:pt x="1568139" y="0"/>
+                  </a:lnTo>
+                  <a:cubicBezTo>
+                    <a:pt x="1586312" y="0"/>
+                    <a:pt x="1603740" y="7219"/>
+                    <a:pt x="1616591" y="20069"/>
+                  </a:cubicBezTo>
+                  <a:cubicBezTo>
+                    <a:pt x="1629441" y="32920"/>
+                    <a:pt x="1636660" y="50348"/>
+                    <a:pt x="1636660" y="68521"/>
+                  </a:cubicBezTo>
+                  <a:lnTo>
+                    <a:pt x="1636660" y="97355"/>
+                  </a:lnTo>
+                  <a:cubicBezTo>
+                    <a:pt x="1636660" y="115528"/>
+                    <a:pt x="1629441" y="132957"/>
+                    <a:pt x="1616591" y="145807"/>
+                  </a:cubicBezTo>
+                  <a:cubicBezTo>
+                    <a:pt x="1603740" y="158657"/>
+                    <a:pt x="1586312" y="165876"/>
+                    <a:pt x="1568139" y="165876"/>
+                  </a:cubicBezTo>
+                  <a:lnTo>
+                    <a:pt x="68521" y="165876"/>
+                  </a:lnTo>
+                  <a:cubicBezTo>
+                    <a:pt x="50348" y="165876"/>
+                    <a:pt x="32920" y="158657"/>
+                    <a:pt x="20069" y="145807"/>
+                  </a:cubicBezTo>
+                  <a:cubicBezTo>
+                    <a:pt x="7219" y="132957"/>
+                    <a:pt x="0" y="115528"/>
+                    <a:pt x="0" y="97355"/>
+                  </a:cubicBezTo>
+                  <a:lnTo>
+                    <a:pt x="0" y="68521"/>
+                  </a:lnTo>
+                  <a:cubicBezTo>
+                    <a:pt x="0" y="50348"/>
+                    <a:pt x="7219" y="32920"/>
+                    <a:pt x="20069" y="20069"/>
+                  </a:cubicBezTo>
+                  <a:cubicBezTo>
+                    <a:pt x="32920" y="7219"/>
+                    <a:pt x="50348" y="0"/>
+                    <a:pt x="68521" y="0"/>
+                  </a:cubicBezTo>
+                  <a:close/>
+                </a:path>
+              </a:pathLst>
+            </a:custGeom>
+            <a:gradFill rotWithShape="true">
+              <a:gsLst>
+                <a:gs pos="0">
+                  <a:srgbClr val="FF004D">
+                    <a:alpha val="100000"/>
+                  </a:srgbClr>
+                </a:gs>
+                <a:gs pos="100000">
+                  <a:srgbClr val="FF54DF">
+                    <a:alpha val="100000"/>
+                  </a:srgbClr>
+                </a:gs>
+              </a:gsLst>
+              <a:lin ang="0"/>
+            </a:gradFill>
+            <a:ln cap="rnd">
+              <a:noFill/>
+              <a:prstDash val="solid"/>
+              <a:round/>
+            </a:ln>
+          </p:spPr>
+        </p:sp>
+        <p:sp>
+          <p:nvSpPr>
+            <p:cNvPr name="TextBox 13" id="13"/>
+            <p:cNvSpPr txBox="true"/>
+            <p:nvPr/>
+          </p:nvSpPr>
+          <p:spPr>
+            <a:xfrm>
+              <a:off x="0" y="-66675"/>
+              <a:ext cx="1636660" cy="232551"/>
+            </a:xfrm>
+            <a:prstGeom prst="rect">
+              <a:avLst/>
+            </a:prstGeom>
+          </p:spPr>
+          <p:txBody>
+            <a:bodyPr anchor="ctr" rtlCol="false" tIns="50800" lIns="50800" bIns="50800" rIns="50800"/>
+            <a:lstStyle/>
+            <a:p>
+              <a:pPr algn="ctr">
+                <a:lnSpc>
+                  <a:spcPts val="2800"/>
+                </a:lnSpc>
+              </a:pPr>
+            </a:p>
+          </p:txBody>
+        </p:sp>
+      </p:grpSp>
+      <p:sp>
+        <p:nvSpPr>
+          <p:cNvPr name="TextBox 14" id="14"/>
+          <p:cNvSpPr txBox="true"/>
+          <p:nvPr/>
+        </p:nvSpPr>
+        <p:spPr>
+          <a:xfrm rot="0">
+            <a:off x="14680864" y="8890000"/>
+            <a:ext cx="2578436" cy="368300"/>
+          </a:xfrm>
+          <a:prstGeom prst="rect">
+            <a:avLst/>
+          </a:prstGeom>
+        </p:spPr>
+        <p:txBody>
+          <a:bodyPr anchor="t" rtlCol="false" tIns="0" lIns="0" bIns="0" rIns="0">
+            <a:spAutoFit/>
+          </a:bodyPr>
+          <a:lstStyle/>
+          <a:p>
+            <a:pPr algn="r">
+              <a:lnSpc>
+                <a:spcPts val="2800"/>
+              </a:lnSpc>
+            </a:pPr>
+            <a:r>
+              <a:rPr lang="en-US" b="true" sz="2000">
+                <a:solidFill>
+                  <a:srgbClr val="FFFFFF"/>
+                </a:solidFill>
+                <a:latin typeface="Poppins Bold"/>
+                <a:ea typeface="Poppins Bold"/>
+                <a:cs typeface="Poppins Bold"/>
+                <a:sym typeface="Poppins Bold"/>
+              </a:rPr>
+              <a:t>SIGUIENTE&gt;</a:t>
+            </a:r>
+          </a:p>
+        </p:txBody>
+      </p:sp>
+      <p:sp>
+        <p:nvSpPr>
+          <p:cNvPr name="Freeform 15" id="15"/>
+          <p:cNvSpPr/>
+          <p:nvPr/>
+        </p:nvSpPr>
+        <p:spPr>
+          <a:xfrm flipH="false" flipV="false" rot="0">
+            <a:off x="0" y="3477618"/>
+            <a:ext cx="18288000" cy="6809382"/>
+          </a:xfrm>
+          <a:custGeom>
+            <a:avLst/>
+            <a:gdLst/>
+            <a:ahLst/>
+            <a:cxnLst/>
+            <a:rect r="r" b="b" t="t" l="l"/>
+            <a:pathLst>
+              <a:path h="6809382" w="18288000">
+                <a:moveTo>
+                  <a:pt x="0" y="0"/>
+                </a:moveTo>
+                <a:lnTo>
+                  <a:pt x="18288000" y="0"/>
+                </a:lnTo>
+                <a:lnTo>
+                  <a:pt x="18288000" y="6809382"/>
+                </a:lnTo>
+                <a:lnTo>
+                  <a:pt x="0" y="6809382"/>
+                </a:lnTo>
+                <a:lnTo>
+                  <a:pt x="0" y="0"/>
+                </a:lnTo>
+                <a:close/>
+              </a:path>
+            </a:pathLst>
+          </a:custGeom>
+          <a:blipFill>
+            <a:blip r:embed="rId5"/>
+            <a:stretch>
+              <a:fillRect l="-1180" t="0" r="-1180" b="0"/>
+            </a:stretch>
+          </a:blipFill>
+        </p:spPr>
+      </p:sp>
+      <p:sp>
+        <p:nvSpPr>
+          <p:cNvPr name="TextBox 16" id="16"/>
+          <p:cNvSpPr txBox="true"/>
+          <p:nvPr/>
+        </p:nvSpPr>
+        <p:spPr>
+          <a:xfrm rot="0">
+            <a:off x="7954470" y="811213"/>
+            <a:ext cx="2379060" cy="368300"/>
+          </a:xfrm>
+          <a:prstGeom prst="rect">
+            <a:avLst/>
+          </a:prstGeom>
+        </p:spPr>
+        <p:txBody>
+          <a:bodyPr anchor="t" rtlCol="false" tIns="0" lIns="0" bIns="0" rIns="0">
+            <a:spAutoFit/>
+          </a:bodyPr>
+          <a:lstStyle/>
+          <a:p>
+            <a:pPr algn="ctr">
+              <a:lnSpc>
+                <a:spcPts val="2800"/>
+              </a:lnSpc>
+            </a:pPr>
+            <a:r>
+              <a:rPr lang="en-US" b="true" sz="2000">
+                <a:solidFill>
+                  <a:srgbClr val="FFFFFF"/>
+                </a:solidFill>
+                <a:latin typeface="Poppins Bold"/>
+                <a:ea typeface="Poppins Bold"/>
+                <a:cs typeface="Poppins Bold"/>
+                <a:sym typeface="Poppins Bold"/>
+              </a:rPr>
+              <a:t>CRONOGRAMA</a:t>
+            </a:r>
+          </a:p>
+        </p:txBody>
+      </p:sp>
+      <p:sp>
+        <p:nvSpPr>
+          <p:cNvPr name="TextBox 17" id="17"/>
+          <p:cNvSpPr txBox="true"/>
+          <p:nvPr/>
+        </p:nvSpPr>
+        <p:spPr>
+          <a:xfrm rot="0">
+            <a:off x="5512131" y="1969921"/>
+            <a:ext cx="7263739" cy="767081"/>
+          </a:xfrm>
+          <a:prstGeom prst="rect">
+            <a:avLst/>
+          </a:prstGeom>
+        </p:spPr>
+        <p:txBody>
+          <a:bodyPr anchor="t" rtlCol="false" tIns="0" lIns="0" bIns="0" rIns="0">
+            <a:spAutoFit/>
+          </a:bodyPr>
+          <a:lstStyle/>
+          <a:p>
+            <a:pPr algn="ctr">
+              <a:lnSpc>
+                <a:spcPts val="6019"/>
+              </a:lnSpc>
+            </a:pPr>
+            <a:r>
+              <a:rPr lang="en-US" b="true" sz="4299">
+                <a:solidFill>
+                  <a:srgbClr val="FFFFFF"/>
+                </a:solidFill>
+                <a:latin typeface="Poppins Bold"/>
+                <a:ea typeface="Poppins Bold"/>
+                <a:cs typeface="Poppins Bold"/>
+                <a:sym typeface="Poppins Bold"/>
+              </a:rPr>
+              <a:t>AVANCES CARTA GANTT</a:t>
+            </a:r>
+          </a:p>
+        </p:txBody>
+      </p:sp>
+      <p:sp>
+        <p:nvSpPr>
+          <p:cNvPr name="TextBox 18" id="18"/>
+          <p:cNvSpPr txBox="true"/>
+          <p:nvPr/>
+        </p:nvSpPr>
+        <p:spPr>
+          <a:xfrm rot="0">
+            <a:off x="6546463" y="811213"/>
+            <a:ext cx="1007175" cy="368300"/>
+          </a:xfrm>
+          <a:prstGeom prst="rect">
+            <a:avLst/>
+          </a:prstGeom>
+        </p:spPr>
+        <p:txBody>
+          <a:bodyPr anchor="t" rtlCol="false" tIns="0" lIns="0" bIns="0" rIns="0">
+            <a:spAutoFit/>
+          </a:bodyPr>
+          <a:lstStyle/>
+          <a:p>
+            <a:pPr algn="ctr">
+              <a:lnSpc>
+                <a:spcPts val="2800"/>
+              </a:lnSpc>
+            </a:pPr>
+            <a:r>
+              <a:rPr lang="en-US" sz="2000">
+                <a:solidFill>
+                  <a:srgbClr val="FFFFFF"/>
+                </a:solidFill>
+                <a:latin typeface="Poppins"/>
+                <a:ea typeface="Poppins"/>
+                <a:cs typeface="Poppins"/>
+                <a:sym typeface="Poppins"/>
+              </a:rPr>
+              <a:t>CORE</a:t>
+            </a:r>
+          </a:p>
+        </p:txBody>
+      </p:sp>
+      <p:sp>
+        <p:nvSpPr>
+          <p:cNvPr name="TextBox 19" id="19"/>
+          <p:cNvSpPr txBox="true"/>
+          <p:nvPr/>
+        </p:nvSpPr>
+        <p:spPr>
+          <a:xfrm rot="0">
+            <a:off x="10733438" y="811213"/>
+            <a:ext cx="1007175" cy="368300"/>
+          </a:xfrm>
+          <a:prstGeom prst="rect">
+            <a:avLst/>
+          </a:prstGeom>
+        </p:spPr>
+        <p:txBody>
+          <a:bodyPr anchor="t" rtlCol="false" tIns="0" lIns="0" bIns="0" rIns="0">
+            <a:spAutoFit/>
+          </a:bodyPr>
+          <a:lstStyle/>
+          <a:p>
+            <a:pPr algn="ctr">
+              <a:lnSpc>
+                <a:spcPts val="2800"/>
+              </a:lnSpc>
+            </a:pPr>
+            <a:r>
+              <a:rPr lang="en-US" sz="2000">
+                <a:solidFill>
+                  <a:srgbClr val="FFFFFF"/>
+                </a:solidFill>
+                <a:latin typeface="Poppins"/>
+                <a:ea typeface="Poppins"/>
+                <a:cs typeface="Poppins"/>
+                <a:sym typeface="Poppins"/>
+              </a:rPr>
+              <a:t>UTILS</a:t>
+            </a:r>
+          </a:p>
+        </p:txBody>
+      </p:sp>
+    </p:spTree>
+  </p:cSld>
+  <p:clrMapOvr>
+    <a:masterClrMapping/>
+  </p:clrMapOvr>
+</p:sld>
+</file>
+
+<file path=ppt/slides/slide5.xml><?xml version="1.0" encoding="utf-8"?>
+<p:sld xmlns:p="http://schemas.openxmlformats.org/presentationml/2006/main" xmlns:a="http://schemas.openxmlformats.org/drawingml/2006/main" xmlns:r="http://schemas.openxmlformats.org/officeDocument/2006/relationships">
+  <p:cSld>
+    <p:spTree>
+      <p:nvGrpSpPr>
+        <p:cNvPr id="1" name=""/>
+        <p:cNvGrpSpPr/>
+        <p:nvPr/>
+      </p:nvGrpSpPr>
+      <p:grpSpPr>
+        <a:xfrm>
+          <a:off x="0" y="0"/>
+          <a:ext cx="0" cy="0"/>
+          <a:chOff x="0" y="0"/>
+          <a:chExt cx="0" cy="0"/>
+        </a:xfrm>
+      </p:grpSpPr>
+      <p:sp>
+        <p:nvSpPr>
+          <p:cNvPr name="Freeform 2" id="2"/>
+          <p:cNvSpPr/>
+          <p:nvPr/>
+        </p:nvSpPr>
+        <p:spPr>
+          <a:xfrm flipH="false" flipV="false" rot="0">
+            <a:off x="0" y="0"/>
+            <a:ext cx="18288000" cy="10287000"/>
+          </a:xfrm>
+          <a:custGeom>
+            <a:avLst/>
+            <a:gdLst/>
+            <a:ahLst/>
+            <a:cxnLst/>
+            <a:rect r="r" b="b" t="t" l="l"/>
+            <a:pathLst>
+              <a:path h="10287000" w="18288000">
+                <a:moveTo>
+                  <a:pt x="0" y="0"/>
+                </a:moveTo>
+                <a:lnTo>
+                  <a:pt x="18288000" y="0"/>
+                </a:lnTo>
+                <a:lnTo>
+                  <a:pt x="18288000" y="10287000"/>
+                </a:lnTo>
+                <a:lnTo>
+                  <a:pt x="0" y="10287000"/>
+                </a:lnTo>
+                <a:lnTo>
+                  <a:pt x="0" y="0"/>
+                </a:lnTo>
+                <a:close/>
+              </a:path>
+            </a:pathLst>
+          </a:custGeom>
+          <a:blipFill>
+            <a:blip r:embed="rId2"/>
+            <a:stretch>
+              <a:fillRect l="0" t="-9222" r="0" b="-9222"/>
+            </a:stretch>
+          </a:blipFill>
+        </p:spPr>
+      </p:sp>
+      <p:sp>
+        <p:nvSpPr>
+          <p:cNvPr name="Freeform 3" id="3"/>
+          <p:cNvSpPr/>
+          <p:nvPr/>
+        </p:nvSpPr>
+        <p:spPr>
+          <a:xfrm flipH="false" flipV="false" rot="0">
+            <a:off x="-1256894" y="8250330"/>
+            <a:ext cx="6987516" cy="4114800"/>
+          </a:xfrm>
+          <a:custGeom>
+            <a:avLst/>
+            <a:gdLst/>
+            <a:ahLst/>
+            <a:cxnLst/>
+            <a:rect r="r" b="b" t="t" l="l"/>
+            <a:pathLst>
+              <a:path h="4114800" w="6987516">
+                <a:moveTo>
+                  <a:pt x="0" y="0"/>
+                </a:moveTo>
+                <a:lnTo>
+                  <a:pt x="6987516" y="0"/>
+                </a:lnTo>
+                <a:lnTo>
+                  <a:pt x="6987516" y="4114800"/>
+                </a:lnTo>
+                <a:lnTo>
+                  <a:pt x="0" y="4114800"/>
+                </a:lnTo>
+                <a:lnTo>
+                  <a:pt x="0" y="0"/>
+                </a:lnTo>
+                <a:close/>
+              </a:path>
+            </a:pathLst>
+          </a:custGeom>
+          <a:blipFill>
+            <a:blip r:embed="rId3">
+              <a:extLst>
+                <a:ext uri="{96DAC541-7B7A-43D3-8B79-37D633B846F1}">
+                  <asvg:svgBlip xmlns:asvg="http://schemas.microsoft.com/office/drawing/2016/SVG/main" r:embed="rId4"/>
+                </a:ext>
+              </a:extLst>
+            </a:blip>
+            <a:stretch>
+              <a:fillRect l="0" t="0" r="0" b="0"/>
+            </a:stretch>
+          </a:blipFill>
+        </p:spPr>
+      </p:sp>
+      <p:sp>
+        <p:nvSpPr>
+          <p:cNvPr name="Freeform 4" id="4"/>
+          <p:cNvSpPr/>
+          <p:nvPr/>
+        </p:nvSpPr>
+        <p:spPr>
+          <a:xfrm flipH="false" flipV="false" rot="0">
+            <a:off x="12557378" y="-2078130"/>
+            <a:ext cx="6987516" cy="4114800"/>
+          </a:xfrm>
+          <a:custGeom>
+            <a:avLst/>
+            <a:gdLst/>
+            <a:ahLst/>
+            <a:cxnLst/>
+            <a:rect r="r" b="b" t="t" l="l"/>
+            <a:pathLst>
+              <a:path h="4114800" w="6987516">
+                <a:moveTo>
+                  <a:pt x="0" y="0"/>
+                </a:moveTo>
+                <a:lnTo>
+                  <a:pt x="6987516" y="0"/>
+                </a:lnTo>
+                <a:lnTo>
+                  <a:pt x="6987516" y="4114800"/>
+                </a:lnTo>
+                <a:lnTo>
+                  <a:pt x="0" y="4114800"/>
+                </a:lnTo>
+                <a:lnTo>
+                  <a:pt x="0" y="0"/>
+                </a:lnTo>
+                <a:close/>
+              </a:path>
+            </a:pathLst>
+          </a:custGeom>
+          <a:blipFill>
+            <a:blip r:embed="rId3">
+              <a:extLst>
+                <a:ext uri="{96DAC541-7B7A-43D3-8B79-37D633B846F1}">
+                  <asvg:svgBlip xmlns:asvg="http://schemas.microsoft.com/office/drawing/2016/SVG/main" r:embed="rId4"/>
+                </a:ext>
+              </a:extLst>
+            </a:blip>
+            <a:stretch>
+              <a:fillRect l="0" t="0" r="0" b="0"/>
+            </a:stretch>
+          </a:blipFill>
+        </p:spPr>
+      </p:sp>
+      <p:grpSp>
+        <p:nvGrpSpPr>
+          <p:cNvPr name="Group 5" id="5"/>
+          <p:cNvGrpSpPr/>
+          <p:nvPr/>
+        </p:nvGrpSpPr>
+        <p:grpSpPr>
+          <a:xfrm rot="0">
             <a:off x="1028700" y="3253177"/>
             <a:ext cx="7514915" cy="3713970"/>
             <a:chOff x="0" y="0"/>
@@ -11267,7 +13190,7 @@
 </p:sld>
 </file>
 
-<file path=ppt/slides/slide5.xml><?xml version="1.0" encoding="utf-8"?>
+<file path=ppt/slides/slide6.xml><?xml version="1.0" encoding="utf-8"?>
 <p:sld xmlns:p="http://schemas.openxmlformats.org/presentationml/2006/main" xmlns:a="http://schemas.openxmlformats.org/drawingml/2006/main" xmlns:r="http://schemas.openxmlformats.org/officeDocument/2006/relationships">
   <p:cSld>
     <p:spTree>
@@ -12018,7 +13941,7 @@
 </p:sld>
 </file>
 
-<file path=ppt/slides/slide6.xml><?xml version="1.0" encoding="utf-8"?>
+<file path=ppt/slides/slide7.xml><?xml version="1.0" encoding="utf-8"?>
 <p:sld xmlns:p="http://schemas.openxmlformats.org/presentationml/2006/main" xmlns:a="http://schemas.openxmlformats.org/drawingml/2006/main" xmlns:r="http://schemas.openxmlformats.org/officeDocument/2006/relationships">
   <p:cSld>
     <p:spTree>
@@ -12964,7 +14887,7 @@
 </p:sld>
 </file>
 
-<file path=ppt/slides/slide7.xml><?xml version="1.0" encoding="utf-8"?>
+<file path=ppt/slides/slide8.xml><?xml version="1.0" encoding="utf-8"?>
 <p:sld xmlns:p="http://schemas.openxmlformats.org/presentationml/2006/main" xmlns:a="http://schemas.openxmlformats.org/drawingml/2006/main" xmlns:r="http://schemas.openxmlformats.org/officeDocument/2006/relationships">
   <p:cSld>
     <p:spTree>
@@ -14007,7 +15930,7 @@
 </p:sld>
 </file>
 
-<file path=ppt/slides/slide8.xml><?xml version="1.0" encoding="utf-8"?>
+<file path=ppt/slides/slide9.xml><?xml version="1.0" encoding="utf-8"?>
 <p:sld xmlns:p="http://schemas.openxmlformats.org/presentationml/2006/main" xmlns:a="http://schemas.openxmlformats.org/drawingml/2006/main" xmlns:r="http://schemas.openxmlformats.org/officeDocument/2006/relationships">
   <p:cSld>
     <p:spTree>
@@ -15038,1095 +16961,6 @@
                 <a:sym typeface="Poppins Semi-Bold"/>
               </a:rPr>
               <a:t>METRICAS RRSS</a:t>
-            </a:r>
-          </a:p>
-        </p:txBody>
-      </p:sp>
-    </p:spTree>
-  </p:cSld>
-  <p:clrMapOvr>
-    <a:masterClrMapping/>
-  </p:clrMapOvr>
-</p:sld>
-</file>
-
-<file path=ppt/slides/slide9.xml><?xml version="1.0" encoding="utf-8"?>
-<p:sld xmlns:p="http://schemas.openxmlformats.org/presentationml/2006/main" xmlns:a="http://schemas.openxmlformats.org/drawingml/2006/main" xmlns:r="http://schemas.openxmlformats.org/officeDocument/2006/relationships">
-  <p:cSld>
-    <p:spTree>
-      <p:nvGrpSpPr>
-        <p:cNvPr id="1" name=""/>
-        <p:cNvGrpSpPr/>
-        <p:nvPr/>
-      </p:nvGrpSpPr>
-      <p:grpSpPr>
-        <a:xfrm>
-          <a:off x="0" y="0"/>
-          <a:ext cx="0" cy="0"/>
-          <a:chOff x="0" y="0"/>
-          <a:chExt cx="0" cy="0"/>
-        </a:xfrm>
-      </p:grpSpPr>
-      <p:sp>
-        <p:nvSpPr>
-          <p:cNvPr name="Freeform 2" id="2"/>
-          <p:cNvSpPr/>
-          <p:nvPr/>
-        </p:nvSpPr>
-        <p:spPr>
-          <a:xfrm flipH="false" flipV="false" rot="0">
-            <a:off x="0" y="0"/>
-            <a:ext cx="18288000" cy="10287000"/>
-          </a:xfrm>
-          <a:custGeom>
-            <a:avLst/>
-            <a:gdLst/>
-            <a:ahLst/>
-            <a:cxnLst/>
-            <a:rect r="r" b="b" t="t" l="l"/>
-            <a:pathLst>
-              <a:path h="10287000" w="18288000">
-                <a:moveTo>
-                  <a:pt x="0" y="0"/>
-                </a:moveTo>
-                <a:lnTo>
-                  <a:pt x="18288000" y="0"/>
-                </a:lnTo>
-                <a:lnTo>
-                  <a:pt x="18288000" y="10287000"/>
-                </a:lnTo>
-                <a:lnTo>
-                  <a:pt x="0" y="10287000"/>
-                </a:lnTo>
-                <a:lnTo>
-                  <a:pt x="0" y="0"/>
-                </a:lnTo>
-                <a:close/>
-              </a:path>
-            </a:pathLst>
-          </a:custGeom>
-          <a:blipFill>
-            <a:blip r:embed="rId2"/>
-            <a:stretch>
-              <a:fillRect l="0" t="-9222" r="0" b="-9222"/>
-            </a:stretch>
-          </a:blipFill>
-        </p:spPr>
-      </p:sp>
-      <p:sp>
-        <p:nvSpPr>
-          <p:cNvPr name="Freeform 3" id="3"/>
-          <p:cNvSpPr/>
-          <p:nvPr/>
-        </p:nvSpPr>
-        <p:spPr>
-          <a:xfrm flipH="false" flipV="false" rot="0">
-            <a:off x="-1256894" y="8250330"/>
-            <a:ext cx="6987516" cy="4114800"/>
-          </a:xfrm>
-          <a:custGeom>
-            <a:avLst/>
-            <a:gdLst/>
-            <a:ahLst/>
-            <a:cxnLst/>
-            <a:rect r="r" b="b" t="t" l="l"/>
-            <a:pathLst>
-              <a:path h="4114800" w="6987516">
-                <a:moveTo>
-                  <a:pt x="0" y="0"/>
-                </a:moveTo>
-                <a:lnTo>
-                  <a:pt x="6987516" y="0"/>
-                </a:lnTo>
-                <a:lnTo>
-                  <a:pt x="6987516" y="4114800"/>
-                </a:lnTo>
-                <a:lnTo>
-                  <a:pt x="0" y="4114800"/>
-                </a:lnTo>
-                <a:lnTo>
-                  <a:pt x="0" y="0"/>
-                </a:lnTo>
-                <a:close/>
-              </a:path>
-            </a:pathLst>
-          </a:custGeom>
-          <a:blipFill>
-            <a:blip r:embed="rId3">
-              <a:extLst>
-                <a:ext uri="{96DAC541-7B7A-43D3-8B79-37D633B846F1}">
-                  <asvg:svgBlip xmlns:asvg="http://schemas.microsoft.com/office/drawing/2016/SVG/main" r:embed="rId4"/>
-                </a:ext>
-              </a:extLst>
-            </a:blip>
-            <a:stretch>
-              <a:fillRect l="0" t="0" r="0" b="0"/>
-            </a:stretch>
-          </a:blipFill>
-        </p:spPr>
-      </p:sp>
-      <p:sp>
-        <p:nvSpPr>
-          <p:cNvPr name="Freeform 4" id="4"/>
-          <p:cNvSpPr/>
-          <p:nvPr/>
-        </p:nvSpPr>
-        <p:spPr>
-          <a:xfrm flipH="false" flipV="false" rot="0">
-            <a:off x="12557378" y="-2078130"/>
-            <a:ext cx="6987516" cy="4114800"/>
-          </a:xfrm>
-          <a:custGeom>
-            <a:avLst/>
-            <a:gdLst/>
-            <a:ahLst/>
-            <a:cxnLst/>
-            <a:rect r="r" b="b" t="t" l="l"/>
-            <a:pathLst>
-              <a:path h="4114800" w="6987516">
-                <a:moveTo>
-                  <a:pt x="0" y="0"/>
-                </a:moveTo>
-                <a:lnTo>
-                  <a:pt x="6987516" y="0"/>
-                </a:lnTo>
-                <a:lnTo>
-                  <a:pt x="6987516" y="4114800"/>
-                </a:lnTo>
-                <a:lnTo>
-                  <a:pt x="0" y="4114800"/>
-                </a:lnTo>
-                <a:lnTo>
-                  <a:pt x="0" y="0"/>
-                </a:lnTo>
-                <a:close/>
-              </a:path>
-            </a:pathLst>
-          </a:custGeom>
-          <a:blipFill>
-            <a:blip r:embed="rId3">
-              <a:extLst>
-                <a:ext uri="{96DAC541-7B7A-43D3-8B79-37D633B846F1}">
-                  <asvg:svgBlip xmlns:asvg="http://schemas.microsoft.com/office/drawing/2016/SVG/main" r:embed="rId4"/>
-                </a:ext>
-              </a:extLst>
-            </a:blip>
-            <a:stretch>
-              <a:fillRect l="0" t="0" r="0" b="0"/>
-            </a:stretch>
-          </a:blipFill>
-        </p:spPr>
-      </p:sp>
-      <p:grpSp>
-        <p:nvGrpSpPr>
-          <p:cNvPr name="Group 5" id="5"/>
-          <p:cNvGrpSpPr/>
-          <p:nvPr/>
-        </p:nvGrpSpPr>
-        <p:grpSpPr>
-          <a:xfrm rot="0">
-            <a:off x="6036903" y="713794"/>
-            <a:ext cx="6214194" cy="629811"/>
-            <a:chOff x="0" y="0"/>
-            <a:chExt cx="1636660" cy="165876"/>
-          </a:xfrm>
-        </p:grpSpPr>
-        <p:sp>
-          <p:nvSpPr>
-            <p:cNvPr name="Freeform 6" id="6"/>
-            <p:cNvSpPr/>
-            <p:nvPr/>
-          </p:nvSpPr>
-          <p:spPr>
-            <a:xfrm flipH="false" flipV="false" rot="0">
-              <a:off x="0" y="0"/>
-              <a:ext cx="1636660" cy="165876"/>
-            </a:xfrm>
-            <a:custGeom>
-              <a:avLst/>
-              <a:gdLst/>
-              <a:ahLst/>
-              <a:cxnLst/>
-              <a:rect r="r" b="b" t="t" l="l"/>
-              <a:pathLst>
-                <a:path h="165876" w="1636660">
-                  <a:moveTo>
-                    <a:pt x="68521" y="0"/>
-                  </a:moveTo>
-                  <a:lnTo>
-                    <a:pt x="1568139" y="0"/>
-                  </a:lnTo>
-                  <a:cubicBezTo>
-                    <a:pt x="1586312" y="0"/>
-                    <a:pt x="1603740" y="7219"/>
-                    <a:pt x="1616591" y="20069"/>
-                  </a:cubicBezTo>
-                  <a:cubicBezTo>
-                    <a:pt x="1629441" y="32920"/>
-                    <a:pt x="1636660" y="50348"/>
-                    <a:pt x="1636660" y="68521"/>
-                  </a:cubicBezTo>
-                  <a:lnTo>
-                    <a:pt x="1636660" y="97355"/>
-                  </a:lnTo>
-                  <a:cubicBezTo>
-                    <a:pt x="1636660" y="115528"/>
-                    <a:pt x="1629441" y="132957"/>
-                    <a:pt x="1616591" y="145807"/>
-                  </a:cubicBezTo>
-                  <a:cubicBezTo>
-                    <a:pt x="1603740" y="158657"/>
-                    <a:pt x="1586312" y="165876"/>
-                    <a:pt x="1568139" y="165876"/>
-                  </a:cubicBezTo>
-                  <a:lnTo>
-                    <a:pt x="68521" y="165876"/>
-                  </a:lnTo>
-                  <a:cubicBezTo>
-                    <a:pt x="50348" y="165876"/>
-                    <a:pt x="32920" y="158657"/>
-                    <a:pt x="20069" y="145807"/>
-                  </a:cubicBezTo>
-                  <a:cubicBezTo>
-                    <a:pt x="7219" y="132957"/>
-                    <a:pt x="0" y="115528"/>
-                    <a:pt x="0" y="97355"/>
-                  </a:cubicBezTo>
-                  <a:lnTo>
-                    <a:pt x="0" y="68521"/>
-                  </a:lnTo>
-                  <a:cubicBezTo>
-                    <a:pt x="0" y="50348"/>
-                    <a:pt x="7219" y="32920"/>
-                    <a:pt x="20069" y="20069"/>
-                  </a:cubicBezTo>
-                  <a:cubicBezTo>
-                    <a:pt x="32920" y="7219"/>
-                    <a:pt x="50348" y="0"/>
-                    <a:pt x="68521" y="0"/>
-                  </a:cubicBezTo>
-                  <a:close/>
-                </a:path>
-              </a:pathLst>
-            </a:custGeom>
-            <a:gradFill rotWithShape="true">
-              <a:gsLst>
-                <a:gs pos="0">
-                  <a:srgbClr val="9D0186">
-                    <a:alpha val="100000"/>
-                  </a:srgbClr>
-                </a:gs>
-                <a:gs pos="100000">
-                  <a:srgbClr val="A50288">
-                    <a:alpha val="0"/>
-                  </a:srgbClr>
-                </a:gs>
-              </a:gsLst>
-              <a:lin ang="0"/>
-            </a:gradFill>
-            <a:ln cap="rnd">
-              <a:noFill/>
-              <a:prstDash val="solid"/>
-              <a:round/>
-            </a:ln>
-          </p:spPr>
-        </p:sp>
-        <p:sp>
-          <p:nvSpPr>
-            <p:cNvPr name="TextBox 7" id="7"/>
-            <p:cNvSpPr txBox="true"/>
-            <p:nvPr/>
-          </p:nvSpPr>
-          <p:spPr>
-            <a:xfrm>
-              <a:off x="0" y="-66675"/>
-              <a:ext cx="1636660" cy="232551"/>
-            </a:xfrm>
-            <a:prstGeom prst="rect">
-              <a:avLst/>
-            </a:prstGeom>
-          </p:spPr>
-          <p:txBody>
-            <a:bodyPr anchor="ctr" rtlCol="false" tIns="50800" lIns="50800" bIns="50800" rIns="50800"/>
-            <a:lstStyle/>
-            <a:p>
-              <a:pPr algn="ctr">
-                <a:lnSpc>
-                  <a:spcPts val="2800"/>
-                </a:lnSpc>
-              </a:pPr>
-            </a:p>
-          </p:txBody>
-        </p:sp>
-      </p:grpSp>
-      <p:sp>
-        <p:nvSpPr>
-          <p:cNvPr name="TextBox 8" id="8"/>
-          <p:cNvSpPr txBox="true"/>
-          <p:nvPr/>
-        </p:nvSpPr>
-        <p:spPr>
-          <a:xfrm rot="0">
-            <a:off x="8640412" y="811213"/>
-            <a:ext cx="1007175" cy="368300"/>
-          </a:xfrm>
-          <a:prstGeom prst="rect">
-            <a:avLst/>
-          </a:prstGeom>
-        </p:spPr>
-        <p:txBody>
-          <a:bodyPr anchor="t" rtlCol="false" tIns="0" lIns="0" bIns="0" rIns="0">
-            <a:spAutoFit/>
-          </a:bodyPr>
-          <a:lstStyle/>
-          <a:p>
-            <a:pPr algn="ctr">
-              <a:lnSpc>
-                <a:spcPts val="2800"/>
-              </a:lnSpc>
-            </a:pPr>
-            <a:r>
-              <a:rPr lang="en-US" b="true" sz="2000">
-                <a:solidFill>
-                  <a:srgbClr val="FFFFFF"/>
-                </a:solidFill>
-                <a:latin typeface="Poppins Bold"/>
-                <a:ea typeface="Poppins Bold"/>
-                <a:cs typeface="Poppins Bold"/>
-                <a:sym typeface="Poppins Bold"/>
-              </a:rPr>
-              <a:t>HOME</a:t>
-            </a:r>
-          </a:p>
-        </p:txBody>
-      </p:sp>
-      <p:sp>
-        <p:nvSpPr>
-          <p:cNvPr name="TextBox 9" id="9"/>
-          <p:cNvSpPr txBox="true"/>
-          <p:nvPr/>
-        </p:nvSpPr>
-        <p:spPr>
-          <a:xfrm rot="0">
-            <a:off x="6546463" y="811213"/>
-            <a:ext cx="1007175" cy="368300"/>
-          </a:xfrm>
-          <a:prstGeom prst="rect">
-            <a:avLst/>
-          </a:prstGeom>
-        </p:spPr>
-        <p:txBody>
-          <a:bodyPr anchor="t" rtlCol="false" tIns="0" lIns="0" bIns="0" rIns="0">
-            <a:spAutoFit/>
-          </a:bodyPr>
-          <a:lstStyle/>
-          <a:p>
-            <a:pPr algn="ctr">
-              <a:lnSpc>
-                <a:spcPts val="2800"/>
-              </a:lnSpc>
-            </a:pPr>
-            <a:r>
-              <a:rPr lang="en-US" sz="2000">
-                <a:solidFill>
-                  <a:srgbClr val="FFFFFF"/>
-                </a:solidFill>
-                <a:latin typeface="Poppins"/>
-                <a:ea typeface="Poppins"/>
-                <a:cs typeface="Poppins"/>
-                <a:sym typeface="Poppins"/>
-              </a:rPr>
-              <a:t>ABOUT</a:t>
-            </a:r>
-          </a:p>
-        </p:txBody>
-      </p:sp>
-      <p:sp>
-        <p:nvSpPr>
-          <p:cNvPr name="TextBox 10" id="10"/>
-          <p:cNvSpPr txBox="true"/>
-          <p:nvPr/>
-        </p:nvSpPr>
-        <p:spPr>
-          <a:xfrm rot="0">
-            <a:off x="10733438" y="811213"/>
-            <a:ext cx="1007175" cy="368300"/>
-          </a:xfrm>
-          <a:prstGeom prst="rect">
-            <a:avLst/>
-          </a:prstGeom>
-        </p:spPr>
-        <p:txBody>
-          <a:bodyPr anchor="t" rtlCol="false" tIns="0" lIns="0" bIns="0" rIns="0">
-            <a:spAutoFit/>
-          </a:bodyPr>
-          <a:lstStyle/>
-          <a:p>
-            <a:pPr algn="ctr">
-              <a:lnSpc>
-                <a:spcPts val="2800"/>
-              </a:lnSpc>
-            </a:pPr>
-            <a:r>
-              <a:rPr lang="en-US" sz="2000">
-                <a:solidFill>
-                  <a:srgbClr val="FFFFFF"/>
-                </a:solidFill>
-                <a:latin typeface="Poppins"/>
-                <a:ea typeface="Poppins"/>
-                <a:cs typeface="Poppins"/>
-                <a:sym typeface="Poppins"/>
-              </a:rPr>
-              <a:t>MORE</a:t>
-            </a:r>
-          </a:p>
-        </p:txBody>
-      </p:sp>
-      <p:grpSp>
-        <p:nvGrpSpPr>
-          <p:cNvPr name="Group 11" id="11"/>
-          <p:cNvGrpSpPr/>
-          <p:nvPr/>
-        </p:nvGrpSpPr>
-        <p:grpSpPr>
-          <a:xfrm rot="0">
-            <a:off x="6036903" y="713794"/>
-            <a:ext cx="6214194" cy="629811"/>
-            <a:chOff x="0" y="0"/>
-            <a:chExt cx="1636660" cy="165876"/>
-          </a:xfrm>
-        </p:grpSpPr>
-        <p:sp>
-          <p:nvSpPr>
-            <p:cNvPr name="Freeform 12" id="12"/>
-            <p:cNvSpPr/>
-            <p:nvPr/>
-          </p:nvSpPr>
-          <p:spPr>
-            <a:xfrm flipH="false" flipV="false" rot="0">
-              <a:off x="0" y="0"/>
-              <a:ext cx="1636660" cy="165876"/>
-            </a:xfrm>
-            <a:custGeom>
-              <a:avLst/>
-              <a:gdLst/>
-              <a:ahLst/>
-              <a:cxnLst/>
-              <a:rect r="r" b="b" t="t" l="l"/>
-              <a:pathLst>
-                <a:path h="165876" w="1636660">
-                  <a:moveTo>
-                    <a:pt x="68521" y="0"/>
-                  </a:moveTo>
-                  <a:lnTo>
-                    <a:pt x="1568139" y="0"/>
-                  </a:lnTo>
-                  <a:cubicBezTo>
-                    <a:pt x="1586312" y="0"/>
-                    <a:pt x="1603740" y="7219"/>
-                    <a:pt x="1616591" y="20069"/>
-                  </a:cubicBezTo>
-                  <a:cubicBezTo>
-                    <a:pt x="1629441" y="32920"/>
-                    <a:pt x="1636660" y="50348"/>
-                    <a:pt x="1636660" y="68521"/>
-                  </a:cubicBezTo>
-                  <a:lnTo>
-                    <a:pt x="1636660" y="97355"/>
-                  </a:lnTo>
-                  <a:cubicBezTo>
-                    <a:pt x="1636660" y="115528"/>
-                    <a:pt x="1629441" y="132957"/>
-                    <a:pt x="1616591" y="145807"/>
-                  </a:cubicBezTo>
-                  <a:cubicBezTo>
-                    <a:pt x="1603740" y="158657"/>
-                    <a:pt x="1586312" y="165876"/>
-                    <a:pt x="1568139" y="165876"/>
-                  </a:cubicBezTo>
-                  <a:lnTo>
-                    <a:pt x="68521" y="165876"/>
-                  </a:lnTo>
-                  <a:cubicBezTo>
-                    <a:pt x="50348" y="165876"/>
-                    <a:pt x="32920" y="158657"/>
-                    <a:pt x="20069" y="145807"/>
-                  </a:cubicBezTo>
-                  <a:cubicBezTo>
-                    <a:pt x="7219" y="132957"/>
-                    <a:pt x="0" y="115528"/>
-                    <a:pt x="0" y="97355"/>
-                  </a:cubicBezTo>
-                  <a:lnTo>
-                    <a:pt x="0" y="68521"/>
-                  </a:lnTo>
-                  <a:cubicBezTo>
-                    <a:pt x="0" y="50348"/>
-                    <a:pt x="7219" y="32920"/>
-                    <a:pt x="20069" y="20069"/>
-                  </a:cubicBezTo>
-                  <a:cubicBezTo>
-                    <a:pt x="32920" y="7219"/>
-                    <a:pt x="50348" y="0"/>
-                    <a:pt x="68521" y="0"/>
-                  </a:cubicBezTo>
-                  <a:close/>
-                </a:path>
-              </a:pathLst>
-            </a:custGeom>
-            <a:gradFill rotWithShape="true">
-              <a:gsLst>
-                <a:gs pos="0">
-                  <a:srgbClr val="FF004D">
-                    <a:alpha val="100000"/>
-                  </a:srgbClr>
-                </a:gs>
-                <a:gs pos="100000">
-                  <a:srgbClr val="FF54DF">
-                    <a:alpha val="100000"/>
-                  </a:srgbClr>
-                </a:gs>
-              </a:gsLst>
-              <a:lin ang="0"/>
-            </a:gradFill>
-            <a:ln cap="rnd">
-              <a:noFill/>
-              <a:prstDash val="solid"/>
-              <a:round/>
-            </a:ln>
-          </p:spPr>
-        </p:sp>
-        <p:sp>
-          <p:nvSpPr>
-            <p:cNvPr name="TextBox 13" id="13"/>
-            <p:cNvSpPr txBox="true"/>
-            <p:nvPr/>
-          </p:nvSpPr>
-          <p:spPr>
-            <a:xfrm>
-              <a:off x="0" y="-66675"/>
-              <a:ext cx="1636660" cy="232551"/>
-            </a:xfrm>
-            <a:prstGeom prst="rect">
-              <a:avLst/>
-            </a:prstGeom>
-          </p:spPr>
-          <p:txBody>
-            <a:bodyPr anchor="ctr" rtlCol="false" tIns="50800" lIns="50800" bIns="50800" rIns="50800"/>
-            <a:lstStyle/>
-            <a:p>
-              <a:pPr algn="ctr">
-                <a:lnSpc>
-                  <a:spcPts val="2800"/>
-                </a:lnSpc>
-              </a:pPr>
-            </a:p>
-          </p:txBody>
-        </p:sp>
-      </p:grpSp>
-      <p:grpSp>
-        <p:nvGrpSpPr>
-          <p:cNvPr name="Group 14" id="14"/>
-          <p:cNvGrpSpPr/>
-          <p:nvPr/>
-        </p:nvGrpSpPr>
-        <p:grpSpPr>
-          <a:xfrm rot="-10800000">
-            <a:off x="-142334" y="1609585"/>
-            <a:ext cx="3908141" cy="854170"/>
-            <a:chOff x="0" y="0"/>
-            <a:chExt cx="1029305" cy="224967"/>
-          </a:xfrm>
-        </p:grpSpPr>
-        <p:sp>
-          <p:nvSpPr>
-            <p:cNvPr name="Freeform 15" id="15"/>
-            <p:cNvSpPr/>
-            <p:nvPr/>
-          </p:nvSpPr>
-          <p:spPr>
-            <a:xfrm flipH="false" flipV="false" rot="0">
-              <a:off x="0" y="0"/>
-              <a:ext cx="1029305" cy="224967"/>
-            </a:xfrm>
-            <a:custGeom>
-              <a:avLst/>
-              <a:gdLst/>
-              <a:ahLst/>
-              <a:cxnLst/>
-              <a:rect r="r" b="b" t="t" l="l"/>
-              <a:pathLst>
-                <a:path h="224967" w="1029305">
-                  <a:moveTo>
-                    <a:pt x="55467" y="0"/>
-                  </a:moveTo>
-                  <a:lnTo>
-                    <a:pt x="973837" y="0"/>
-                  </a:lnTo>
-                  <a:cubicBezTo>
-                    <a:pt x="988548" y="0"/>
-                    <a:pt x="1002657" y="5844"/>
-                    <a:pt x="1013059" y="16246"/>
-                  </a:cubicBezTo>
-                  <a:cubicBezTo>
-                    <a:pt x="1023461" y="26648"/>
-                    <a:pt x="1029305" y="40756"/>
-                    <a:pt x="1029305" y="55467"/>
-                  </a:cubicBezTo>
-                  <a:lnTo>
-                    <a:pt x="1029305" y="169499"/>
-                  </a:lnTo>
-                  <a:cubicBezTo>
-                    <a:pt x="1029305" y="184210"/>
-                    <a:pt x="1023461" y="198318"/>
-                    <a:pt x="1013059" y="208721"/>
-                  </a:cubicBezTo>
-                  <a:cubicBezTo>
-                    <a:pt x="1002657" y="219123"/>
-                    <a:pt x="988548" y="224967"/>
-                    <a:pt x="973837" y="224967"/>
-                  </a:cubicBezTo>
-                  <a:lnTo>
-                    <a:pt x="55467" y="224967"/>
-                  </a:lnTo>
-                  <a:cubicBezTo>
-                    <a:pt x="40756" y="224967"/>
-                    <a:pt x="26648" y="219123"/>
-                    <a:pt x="16246" y="208721"/>
-                  </a:cubicBezTo>
-                  <a:cubicBezTo>
-                    <a:pt x="5844" y="198318"/>
-                    <a:pt x="0" y="184210"/>
-                    <a:pt x="0" y="169499"/>
-                  </a:cubicBezTo>
-                  <a:lnTo>
-                    <a:pt x="0" y="55467"/>
-                  </a:lnTo>
-                  <a:cubicBezTo>
-                    <a:pt x="0" y="40756"/>
-                    <a:pt x="5844" y="26648"/>
-                    <a:pt x="16246" y="16246"/>
-                  </a:cubicBezTo>
-                  <a:cubicBezTo>
-                    <a:pt x="26648" y="5844"/>
-                    <a:pt x="40756" y="0"/>
-                    <a:pt x="55467" y="0"/>
-                  </a:cubicBezTo>
-                  <a:close/>
-                </a:path>
-              </a:pathLst>
-            </a:custGeom>
-            <a:gradFill rotWithShape="true">
-              <a:gsLst>
-                <a:gs pos="0">
-                  <a:srgbClr val="9D0186">
-                    <a:alpha val="100000"/>
-                  </a:srgbClr>
-                </a:gs>
-                <a:gs pos="100000">
-                  <a:srgbClr val="A50288">
-                    <a:alpha val="0"/>
-                  </a:srgbClr>
-                </a:gs>
-              </a:gsLst>
-              <a:lin ang="0"/>
-            </a:gradFill>
-            <a:ln w="47625" cap="rnd">
-              <a:gradFill>
-                <a:gsLst>
-                  <a:gs pos="0">
-                    <a:srgbClr val="9D0186">
-                      <a:alpha val="100000"/>
-                    </a:srgbClr>
-                  </a:gs>
-                  <a:gs pos="100000">
-                    <a:srgbClr val="A50288">
-                      <a:alpha val="0"/>
-                    </a:srgbClr>
-                  </a:gs>
-                </a:gsLst>
-                <a:lin ang="0"/>
-              </a:gradFill>
-              <a:prstDash val="solid"/>
-              <a:round/>
-            </a:ln>
-          </p:spPr>
-        </p:sp>
-        <p:sp>
-          <p:nvSpPr>
-            <p:cNvPr name="TextBox 16" id="16"/>
-            <p:cNvSpPr txBox="true"/>
-            <p:nvPr/>
-          </p:nvSpPr>
-          <p:spPr>
-            <a:xfrm>
-              <a:off x="0" y="-66675"/>
-              <a:ext cx="1029305" cy="291642"/>
-            </a:xfrm>
-            <a:prstGeom prst="rect">
-              <a:avLst/>
-            </a:prstGeom>
-          </p:spPr>
-          <p:txBody>
-            <a:bodyPr anchor="ctr" rtlCol="false" tIns="50800" lIns="50800" bIns="50800" rIns="50800"/>
-            <a:lstStyle/>
-            <a:p>
-              <a:pPr algn="ctr">
-                <a:lnSpc>
-                  <a:spcPts val="2800"/>
-                </a:lnSpc>
-              </a:pPr>
-            </a:p>
-          </p:txBody>
-        </p:sp>
-      </p:grpSp>
-      <p:sp>
-        <p:nvSpPr>
-          <p:cNvPr name="Freeform 17" id="17"/>
-          <p:cNvSpPr/>
-          <p:nvPr/>
-        </p:nvSpPr>
-        <p:spPr>
-          <a:xfrm flipH="false" flipV="false" rot="0">
-            <a:off x="296213" y="3765861"/>
-            <a:ext cx="7257425" cy="6123452"/>
-          </a:xfrm>
-          <a:custGeom>
-            <a:avLst/>
-            <a:gdLst/>
-            <a:ahLst/>
-            <a:cxnLst/>
-            <a:rect r="r" b="b" t="t" l="l"/>
-            <a:pathLst>
-              <a:path h="6123452" w="7257425">
-                <a:moveTo>
-                  <a:pt x="0" y="0"/>
-                </a:moveTo>
-                <a:lnTo>
-                  <a:pt x="7257425" y="0"/>
-                </a:lnTo>
-                <a:lnTo>
-                  <a:pt x="7257425" y="6123453"/>
-                </a:lnTo>
-                <a:lnTo>
-                  <a:pt x="0" y="6123453"/>
-                </a:lnTo>
-                <a:lnTo>
-                  <a:pt x="0" y="0"/>
-                </a:lnTo>
-                <a:close/>
-              </a:path>
-            </a:pathLst>
-          </a:custGeom>
-          <a:blipFill>
-            <a:blip r:embed="rId5"/>
-            <a:stretch>
-              <a:fillRect l="0" t="0" r="0" b="0"/>
-            </a:stretch>
-          </a:blipFill>
-        </p:spPr>
-      </p:sp>
-      <p:sp>
-        <p:nvSpPr>
-          <p:cNvPr name="Freeform 18" id="18"/>
-          <p:cNvSpPr/>
-          <p:nvPr/>
-        </p:nvSpPr>
-        <p:spPr>
-          <a:xfrm flipH="false" flipV="false" rot="0">
-            <a:off x="7832056" y="6829702"/>
-            <a:ext cx="4229397" cy="2987011"/>
-          </a:xfrm>
-          <a:custGeom>
-            <a:avLst/>
-            <a:gdLst/>
-            <a:ahLst/>
-            <a:cxnLst/>
-            <a:rect r="r" b="b" t="t" l="l"/>
-            <a:pathLst>
-              <a:path h="2987011" w="4229397">
-                <a:moveTo>
-                  <a:pt x="0" y="0"/>
-                </a:moveTo>
-                <a:lnTo>
-                  <a:pt x="4229396" y="0"/>
-                </a:lnTo>
-                <a:lnTo>
-                  <a:pt x="4229396" y="2987012"/>
-                </a:lnTo>
-                <a:lnTo>
-                  <a:pt x="0" y="2987012"/>
-                </a:lnTo>
-                <a:lnTo>
-                  <a:pt x="0" y="0"/>
-                </a:lnTo>
-                <a:close/>
-              </a:path>
-            </a:pathLst>
-          </a:custGeom>
-          <a:blipFill>
-            <a:blip r:embed="rId6"/>
-            <a:stretch>
-              <a:fillRect l="0" t="0" r="0" b="0"/>
-            </a:stretch>
-          </a:blipFill>
-        </p:spPr>
-      </p:sp>
-      <p:sp>
-        <p:nvSpPr>
-          <p:cNvPr name="Freeform 19" id="19"/>
-          <p:cNvSpPr/>
-          <p:nvPr/>
-        </p:nvSpPr>
-        <p:spPr>
-          <a:xfrm flipH="false" flipV="false" rot="0">
-            <a:off x="10113876" y="1849345"/>
-            <a:ext cx="7914767" cy="4659819"/>
-          </a:xfrm>
-          <a:custGeom>
-            <a:avLst/>
-            <a:gdLst/>
-            <a:ahLst/>
-            <a:cxnLst/>
-            <a:rect r="r" b="b" t="t" l="l"/>
-            <a:pathLst>
-              <a:path h="4659819" w="7914767">
-                <a:moveTo>
-                  <a:pt x="0" y="0"/>
-                </a:moveTo>
-                <a:lnTo>
-                  <a:pt x="7914767" y="0"/>
-                </a:lnTo>
-                <a:lnTo>
-                  <a:pt x="7914767" y="4659819"/>
-                </a:lnTo>
-                <a:lnTo>
-                  <a:pt x="0" y="4659819"/>
-                </a:lnTo>
-                <a:lnTo>
-                  <a:pt x="0" y="0"/>
-                </a:lnTo>
-                <a:close/>
-              </a:path>
-            </a:pathLst>
-          </a:custGeom>
-          <a:blipFill>
-            <a:blip r:embed="rId7"/>
-            <a:stretch>
-              <a:fillRect l="0" t="0" r="0" b="0"/>
-            </a:stretch>
-          </a:blipFill>
-        </p:spPr>
-      </p:sp>
-      <p:sp>
-        <p:nvSpPr>
-          <p:cNvPr name="Freeform 20" id="20"/>
-          <p:cNvSpPr/>
-          <p:nvPr/>
-        </p:nvSpPr>
-        <p:spPr>
-          <a:xfrm flipH="false" flipV="false" rot="0">
-            <a:off x="12339870" y="7388116"/>
-            <a:ext cx="5688773" cy="1870184"/>
-          </a:xfrm>
-          <a:custGeom>
-            <a:avLst/>
-            <a:gdLst/>
-            <a:ahLst/>
-            <a:cxnLst/>
-            <a:rect r="r" b="b" t="t" l="l"/>
-            <a:pathLst>
-              <a:path h="1870184" w="5688773">
-                <a:moveTo>
-                  <a:pt x="0" y="0"/>
-                </a:moveTo>
-                <a:lnTo>
-                  <a:pt x="5688773" y="0"/>
-                </a:lnTo>
-                <a:lnTo>
-                  <a:pt x="5688773" y="1870184"/>
-                </a:lnTo>
-                <a:lnTo>
-                  <a:pt x="0" y="1870184"/>
-                </a:lnTo>
-                <a:lnTo>
-                  <a:pt x="0" y="0"/>
-                </a:lnTo>
-                <a:close/>
-              </a:path>
-            </a:pathLst>
-          </a:custGeom>
-          <a:blipFill>
-            <a:blip r:embed="rId8"/>
-            <a:stretch>
-              <a:fillRect l="0" t="0" r="0" b="0"/>
-            </a:stretch>
-          </a:blipFill>
-        </p:spPr>
-      </p:sp>
-      <p:sp>
-        <p:nvSpPr>
-          <p:cNvPr name="TextBox 21" id="21"/>
-          <p:cNvSpPr txBox="true"/>
-          <p:nvPr/>
-        </p:nvSpPr>
-        <p:spPr>
-          <a:xfrm rot="0">
-            <a:off x="8174124" y="811213"/>
-            <a:ext cx="1939751" cy="368300"/>
-          </a:xfrm>
-          <a:prstGeom prst="rect">
-            <a:avLst/>
-          </a:prstGeom>
-        </p:spPr>
-        <p:txBody>
-          <a:bodyPr anchor="t" rtlCol="false" tIns="0" lIns="0" bIns="0" rIns="0">
-            <a:spAutoFit/>
-          </a:bodyPr>
-          <a:lstStyle/>
-          <a:p>
-            <a:pPr algn="ctr">
-              <a:lnSpc>
-                <a:spcPts val="2800"/>
-              </a:lnSpc>
-            </a:pPr>
-            <a:r>
-              <a:rPr lang="en-US" b="true" sz="2000">
-                <a:solidFill>
-                  <a:srgbClr val="FFFFFF"/>
-                </a:solidFill>
-                <a:latin typeface="Poppins Bold"/>
-                <a:ea typeface="Poppins Bold"/>
-                <a:cs typeface="Poppins Bold"/>
-                <a:sym typeface="Poppins Bold"/>
-              </a:rPr>
-              <a:t>MODULOS</a:t>
-            </a:r>
-          </a:p>
-        </p:txBody>
-      </p:sp>
-      <p:sp>
-        <p:nvSpPr>
-          <p:cNvPr name="TextBox 22" id="22"/>
-          <p:cNvSpPr txBox="true"/>
-          <p:nvPr/>
-        </p:nvSpPr>
-        <p:spPr>
-          <a:xfrm rot="0">
-            <a:off x="6546463" y="811213"/>
-            <a:ext cx="1007175" cy="368300"/>
-          </a:xfrm>
-          <a:prstGeom prst="rect">
-            <a:avLst/>
-          </a:prstGeom>
-        </p:spPr>
-        <p:txBody>
-          <a:bodyPr anchor="t" rtlCol="false" tIns="0" lIns="0" bIns="0" rIns="0">
-            <a:spAutoFit/>
-          </a:bodyPr>
-          <a:lstStyle/>
-          <a:p>
-            <a:pPr algn="ctr">
-              <a:lnSpc>
-                <a:spcPts val="2800"/>
-              </a:lnSpc>
-            </a:pPr>
-            <a:r>
-              <a:rPr lang="en-US" sz="2000">
-                <a:solidFill>
-                  <a:srgbClr val="FFFFFF"/>
-                </a:solidFill>
-                <a:latin typeface="Poppins"/>
-                <a:ea typeface="Poppins"/>
-                <a:cs typeface="Poppins"/>
-                <a:sym typeface="Poppins"/>
-              </a:rPr>
-              <a:t>CORE</a:t>
-            </a:r>
-          </a:p>
-        </p:txBody>
-      </p:sp>
-      <p:sp>
-        <p:nvSpPr>
-          <p:cNvPr name="TextBox 23" id="23"/>
-          <p:cNvSpPr txBox="true"/>
-          <p:nvPr/>
-        </p:nvSpPr>
-        <p:spPr>
-          <a:xfrm rot="0">
-            <a:off x="10733438" y="811213"/>
-            <a:ext cx="1007175" cy="368300"/>
-          </a:xfrm>
-          <a:prstGeom prst="rect">
-            <a:avLst/>
-          </a:prstGeom>
-        </p:spPr>
-        <p:txBody>
-          <a:bodyPr anchor="t" rtlCol="false" tIns="0" lIns="0" bIns="0" rIns="0">
-            <a:spAutoFit/>
-          </a:bodyPr>
-          <a:lstStyle/>
-          <a:p>
-            <a:pPr algn="ctr">
-              <a:lnSpc>
-                <a:spcPts val="2800"/>
-              </a:lnSpc>
-            </a:pPr>
-            <a:r>
-              <a:rPr lang="en-US" sz="2000">
-                <a:solidFill>
-                  <a:srgbClr val="FFFFFF"/>
-                </a:solidFill>
-                <a:latin typeface="Poppins"/>
-                <a:ea typeface="Poppins"/>
-                <a:cs typeface="Poppins"/>
-                <a:sym typeface="Poppins"/>
-              </a:rPr>
-              <a:t>UTILS</a:t>
-            </a:r>
-          </a:p>
-        </p:txBody>
-      </p:sp>
-      <p:sp>
-        <p:nvSpPr>
-          <p:cNvPr name="TextBox 24" id="24"/>
-          <p:cNvSpPr txBox="true"/>
-          <p:nvPr/>
-        </p:nvSpPr>
-        <p:spPr>
-          <a:xfrm rot="0">
-            <a:off x="353052" y="1782670"/>
-            <a:ext cx="3283922" cy="441325"/>
-          </a:xfrm>
-          <a:prstGeom prst="rect">
-            <a:avLst/>
-          </a:prstGeom>
-        </p:spPr>
-        <p:txBody>
-          <a:bodyPr anchor="t" rtlCol="false" tIns="0" lIns="0" bIns="0" rIns="0">
-            <a:spAutoFit/>
-          </a:bodyPr>
-          <a:lstStyle/>
-          <a:p>
-            <a:pPr algn="just" marL="0" indent="0" lvl="0">
-              <a:lnSpc>
-                <a:spcPts val="3499"/>
-              </a:lnSpc>
-              <a:spcBef>
-                <a:spcPct val="0"/>
-              </a:spcBef>
-            </a:pPr>
-            <a:r>
-              <a:rPr lang="en-US" b="true" sz="2499">
-                <a:solidFill>
-                  <a:srgbClr val="FFFFFF"/>
-                </a:solidFill>
-                <a:latin typeface="Poppins Semi-Bold"/>
-                <a:ea typeface="Poppins Semi-Bold"/>
-                <a:cs typeface="Poppins Semi-Bold"/>
-                <a:sym typeface="Poppins Semi-Bold"/>
-              </a:rPr>
-              <a:t>TEST COGNITIVOS</a:t>
             </a:r>
           </a:p>
         </p:txBody>
